--- a/m9/diapositivos/sessao-02-m9-f02.pptx
+++ b/m9/diapositivos/sessao-02-m9-f02.pptx
@@ -15,9 +15,10 @@
     <p:sldId id="263" r:id="rId9"/>
     <p:sldId id="264" r:id="rId10"/>
     <p:sldId id="265" r:id="rId11"/>
+    <p:sldId id="266" r:id="rId12"/>
   </p:sldIdLst>
   <p:notesMasterIdLst>
-    <p:notesMasterId r:id="rId12"/>
+    <p:notesMasterId r:id="rId13"/>
   </p:notesMasterIdLst>
   <p:sldSz cx="12192000" cy="6858000"/>
   <p:notesSz cx="6858000" cy="12192000"/>
@@ -1496,6 +1497,629 @@
                 <a:ea typeface="Arial" pitchFamily="34" charset="-122"/>
                 <a:cs typeface="Arial" pitchFamily="34" charset="-120"/>
               </a:rPr>
+              <a:t>SÍNTESE</a:t>
+            </a:r>
+            <a:endParaRPr lang="en-US" sz="1100" dirty="0"/>
+          </a:p>
+        </p:txBody>
+      </p:sp>
+      <p:sp>
+        <p:nvSpPr>
+          <p:cNvPr id="8" name="Text 5"/>
+          <p:cNvSpPr/>
+          <p:nvPr/>
+        </p:nvSpPr>
+        <p:spPr>
+          <a:xfrm>
+            <a:off x="822960" y="868680"/>
+            <a:ext cx="9814255" cy="822960"/>
+          </a:xfrm>
+          <a:prstGeom prst="rect">
+            <a:avLst/>
+          </a:prstGeom>
+          <a:noFill/>
+          <a:ln/>
+        </p:spPr>
+        <p:txBody>
+          <a:bodyPr wrap="square" lIns="0" tIns="0" rIns="0" bIns="0" rtlCol="0" anchor="b">
+            <a:normAutofit/>
+          </a:bodyPr>
+          <a:lstStyle/>
+          <a:p>
+            <a:pPr indent="0" marL="0">
+              <a:buNone/>
+            </a:pPr>
+            <a:r>
+              <a:rPr lang="en-US" sz="3400" dirty="0">
+                <a:solidFill>
+                  <a:srgbClr val="F2F0EA"/>
+                </a:solidFill>
+                <a:latin typeface="Arial" pitchFamily="34" charset="0"/>
+                <a:ea typeface="Arial" pitchFamily="34" charset="-122"/>
+                <a:cs typeface="Arial" pitchFamily="34" charset="-120"/>
+              </a:rPr>
+              <a:t>Para fixar</a:t>
+            </a:r>
+            <a:endParaRPr lang="en-US" sz="3400" dirty="0"/>
+          </a:p>
+        </p:txBody>
+      </p:sp>
+      <p:sp>
+        <p:nvSpPr>
+          <p:cNvPr id="9" name="Shape 6"/>
+          <p:cNvSpPr/>
+          <p:nvPr/>
+        </p:nvSpPr>
+        <p:spPr>
+          <a:xfrm>
+            <a:off x="822960" y="1746504"/>
+            <a:ext cx="640080" cy="64008"/>
+          </a:xfrm>
+          <a:prstGeom prst="rect">
+            <a:avLst/>
+          </a:prstGeom>
+          <a:solidFill>
+            <a:srgbClr val="E4555C"/>
+          </a:solidFill>
+          <a:ln w="12700">
+            <a:solidFill>
+              <a:srgbClr val="E4555C"/>
+            </a:solidFill>
+            <a:prstDash val="solid"/>
+          </a:ln>
+        </p:spPr>
+      </p:sp>
+      <p:sp>
+        <p:nvSpPr>
+          <p:cNvPr id="10" name="Shape 7"/>
+          <p:cNvSpPr/>
+          <p:nvPr/>
+        </p:nvSpPr>
+        <p:spPr>
+          <a:xfrm>
+            <a:off x="1005840" y="2286000"/>
+            <a:ext cx="0" cy="2447544"/>
+          </a:xfrm>
+          <a:prstGeom prst="line">
+            <a:avLst/>
+          </a:prstGeom>
+          <a:noFill/>
+          <a:ln w="12700">
+            <a:solidFill>
+              <a:srgbClr val="A9A79F"/>
+            </a:solidFill>
+            <a:prstDash val="solid"/>
+          </a:ln>
+        </p:spPr>
+      </p:sp>
+      <p:sp>
+        <p:nvSpPr>
+          <p:cNvPr id="11" name="Shape 8"/>
+          <p:cNvSpPr/>
+          <p:nvPr/>
+        </p:nvSpPr>
+        <p:spPr>
+          <a:xfrm>
+            <a:off x="822960" y="2103120"/>
+            <a:ext cx="365760" cy="365760"/>
+          </a:xfrm>
+          <a:prstGeom prst="ellipse">
+            <a:avLst/>
+          </a:prstGeom>
+          <a:solidFill>
+            <a:srgbClr val="111111"/>
+          </a:solidFill>
+          <a:ln w="15875">
+            <a:solidFill>
+              <a:srgbClr val="F2F0EA"/>
+            </a:solidFill>
+            <a:prstDash val="solid"/>
+          </a:ln>
+        </p:spPr>
+      </p:sp>
+      <p:sp>
+        <p:nvSpPr>
+          <p:cNvPr id="12" name="Text 9"/>
+          <p:cNvSpPr/>
+          <p:nvPr/>
+        </p:nvSpPr>
+        <p:spPr>
+          <a:xfrm>
+            <a:off x="822960" y="2103120"/>
+            <a:ext cx="365760" cy="365760"/>
+          </a:xfrm>
+          <a:prstGeom prst="rect">
+            <a:avLst/>
+          </a:prstGeom>
+          <a:noFill/>
+          <a:ln/>
+        </p:spPr>
+        <p:txBody>
+          <a:bodyPr wrap="square" lIns="0" tIns="0" rIns="0" bIns="0" rtlCol="0" anchor="ctr"/>
+          <a:lstStyle/>
+          <a:p>
+            <a:pPr algn="ctr" indent="0" marL="0">
+              <a:buNone/>
+            </a:pPr>
+            <a:r>
+              <a:rPr lang="en-US" sz="1300" b="1" dirty="0">
+                <a:solidFill>
+                  <a:srgbClr val="F2F0EA"/>
+                </a:solidFill>
+                <a:latin typeface="Arial" pitchFamily="34" charset="0"/>
+                <a:ea typeface="Arial" pitchFamily="34" charset="-122"/>
+                <a:cs typeface="Arial" pitchFamily="34" charset="-120"/>
+              </a:rPr>
+              <a:t>1</a:t>
+            </a:r>
+            <a:endParaRPr lang="en-US" sz="1300" dirty="0"/>
+          </a:p>
+        </p:txBody>
+      </p:sp>
+      <p:sp>
+        <p:nvSpPr>
+          <p:cNvPr id="13" name="Text 10"/>
+          <p:cNvSpPr/>
+          <p:nvPr/>
+        </p:nvSpPr>
+        <p:spPr>
+          <a:xfrm>
+            <a:off x="1417320" y="2112264"/>
+            <a:ext cx="9174175" cy="1223772"/>
+          </a:xfrm>
+          <a:prstGeom prst="rect">
+            <a:avLst/>
+          </a:prstGeom>
+          <a:noFill/>
+          <a:ln/>
+        </p:spPr>
+        <p:txBody>
+          <a:bodyPr wrap="square" lIns="0" tIns="0" rIns="0" bIns="0" rtlCol="0" anchor="t">
+            <a:normAutofit/>
+          </a:bodyPr>
+          <a:lstStyle/>
+          <a:p>
+            <a:pPr indent="0" marL="0">
+              <a:lnSpc>
+                <a:spcPct val="105000"/>
+              </a:lnSpc>
+              <a:buNone/>
+            </a:pPr>
+            <a:r>
+              <a:rPr lang="en-US" sz="2200" dirty="0">
+                <a:solidFill>
+                  <a:srgbClr val="F2F0EA"/>
+                </a:solidFill>
+                <a:latin typeface="Arial" pitchFamily="34" charset="0"/>
+                <a:ea typeface="Arial" pitchFamily="34" charset="-122"/>
+                <a:cs typeface="Arial" pitchFamily="34" charset="-120"/>
+              </a:rPr>
+              <a:t>Trabalhaste o trio da passarola: o engenho do padre Bartolomeu Lourenço, os olhos de Blimunda, que recolhem vontades em jejum, e a mão direita de Baltasar, que construiu.</a:t>
+            </a:r>
+            <a:endParaRPr lang="en-US" sz="2200" dirty="0"/>
+          </a:p>
+        </p:txBody>
+      </p:sp>
+      <p:sp>
+        <p:nvSpPr>
+          <p:cNvPr id="14" name="Shape 11"/>
+          <p:cNvSpPr/>
+          <p:nvPr/>
+        </p:nvSpPr>
+        <p:spPr>
+          <a:xfrm>
+            <a:off x="822960" y="3326892"/>
+            <a:ext cx="365760" cy="365760"/>
+          </a:xfrm>
+          <a:prstGeom prst="ellipse">
+            <a:avLst/>
+          </a:prstGeom>
+          <a:solidFill>
+            <a:srgbClr val="111111"/>
+          </a:solidFill>
+          <a:ln w="15875">
+            <a:solidFill>
+              <a:srgbClr val="F2F0EA"/>
+            </a:solidFill>
+            <a:prstDash val="solid"/>
+          </a:ln>
+        </p:spPr>
+      </p:sp>
+      <p:sp>
+        <p:nvSpPr>
+          <p:cNvPr id="15" name="Text 12"/>
+          <p:cNvSpPr/>
+          <p:nvPr/>
+        </p:nvSpPr>
+        <p:spPr>
+          <a:xfrm>
+            <a:off x="822960" y="3326892"/>
+            <a:ext cx="365760" cy="365760"/>
+          </a:xfrm>
+          <a:prstGeom prst="rect">
+            <a:avLst/>
+          </a:prstGeom>
+          <a:noFill/>
+          <a:ln/>
+        </p:spPr>
+        <p:txBody>
+          <a:bodyPr wrap="square" lIns="0" tIns="0" rIns="0" bIns="0" rtlCol="0" anchor="ctr"/>
+          <a:lstStyle/>
+          <a:p>
+            <a:pPr algn="ctr" indent="0" marL="0">
+              <a:buNone/>
+            </a:pPr>
+            <a:r>
+              <a:rPr lang="en-US" sz="1300" b="1" dirty="0">
+                <a:solidFill>
+                  <a:srgbClr val="F2F0EA"/>
+                </a:solidFill>
+                <a:latin typeface="Arial" pitchFamily="34" charset="0"/>
+                <a:ea typeface="Arial" pitchFamily="34" charset="-122"/>
+                <a:cs typeface="Arial" pitchFamily="34" charset="-120"/>
+              </a:rPr>
+              <a:t>2</a:t>
+            </a:r>
+            <a:endParaRPr lang="en-US" sz="1300" dirty="0"/>
+          </a:p>
+        </p:txBody>
+      </p:sp>
+      <p:sp>
+        <p:nvSpPr>
+          <p:cNvPr id="16" name="Text 13"/>
+          <p:cNvSpPr/>
+          <p:nvPr/>
+        </p:nvSpPr>
+        <p:spPr>
+          <a:xfrm>
+            <a:off x="1417320" y="3336036"/>
+            <a:ext cx="9174175" cy="1223772"/>
+          </a:xfrm>
+          <a:prstGeom prst="rect">
+            <a:avLst/>
+          </a:prstGeom>
+          <a:noFill/>
+          <a:ln/>
+        </p:spPr>
+        <p:txBody>
+          <a:bodyPr wrap="square" lIns="0" tIns="0" rIns="0" bIns="0" rtlCol="0" anchor="t">
+            <a:normAutofit/>
+          </a:bodyPr>
+          <a:lstStyle/>
+          <a:p>
+            <a:pPr indent="0" marL="0">
+              <a:lnSpc>
+                <a:spcPct val="105000"/>
+              </a:lnSpc>
+              <a:buNone/>
+            </a:pPr>
+            <a:r>
+              <a:rPr lang="en-US" sz="2200" dirty="0">
+                <a:solidFill>
+                  <a:srgbClr val="F2F0EA"/>
+                </a:solidFill>
+                <a:latin typeface="Arial" pitchFamily="34" charset="0"/>
+                <a:ea typeface="Arial" pitchFamily="34" charset="-122"/>
+                <a:cs typeface="Arial" pitchFamily="34" charset="-120"/>
+              </a:rPr>
+              <a:t>A passarola é um símbolo: representa o sonho, a liberdade e a ciência, enquanto o convento representa o poder, a vaidade régia e o sacrifício de milhares.</a:t>
+            </a:r>
+            <a:endParaRPr lang="en-US" sz="2200" dirty="0"/>
+          </a:p>
+        </p:txBody>
+      </p:sp>
+      <p:sp>
+        <p:nvSpPr>
+          <p:cNvPr id="17" name="Shape 14"/>
+          <p:cNvSpPr/>
+          <p:nvPr/>
+        </p:nvSpPr>
+        <p:spPr>
+          <a:xfrm>
+            <a:off x="822960" y="4550664"/>
+            <a:ext cx="365760" cy="365760"/>
+          </a:xfrm>
+          <a:prstGeom prst="ellipse">
+            <a:avLst/>
+          </a:prstGeom>
+          <a:solidFill>
+            <a:srgbClr val="111111"/>
+          </a:solidFill>
+          <a:ln w="15875">
+            <a:solidFill>
+              <a:srgbClr val="F2F0EA"/>
+            </a:solidFill>
+            <a:prstDash val="solid"/>
+          </a:ln>
+        </p:spPr>
+      </p:sp>
+      <p:sp>
+        <p:nvSpPr>
+          <p:cNvPr id="18" name="Text 15"/>
+          <p:cNvSpPr/>
+          <p:nvPr/>
+        </p:nvSpPr>
+        <p:spPr>
+          <a:xfrm>
+            <a:off x="822960" y="4550664"/>
+            <a:ext cx="365760" cy="365760"/>
+          </a:xfrm>
+          <a:prstGeom prst="rect">
+            <a:avLst/>
+          </a:prstGeom>
+          <a:noFill/>
+          <a:ln/>
+        </p:spPr>
+        <p:txBody>
+          <a:bodyPr wrap="square" lIns="0" tIns="0" rIns="0" bIns="0" rtlCol="0" anchor="ctr"/>
+          <a:lstStyle/>
+          <a:p>
+            <a:pPr algn="ctr" indent="0" marL="0">
+              <a:buNone/>
+            </a:pPr>
+            <a:r>
+              <a:rPr lang="en-US" sz="1300" b="1" dirty="0">
+                <a:solidFill>
+                  <a:srgbClr val="F2F0EA"/>
+                </a:solidFill>
+                <a:latin typeface="Arial" pitchFamily="34" charset="0"/>
+                <a:ea typeface="Arial" pitchFamily="34" charset="-122"/>
+                <a:cs typeface="Arial" pitchFamily="34" charset="-120"/>
+              </a:rPr>
+              <a:t>3</a:t>
+            </a:r>
+            <a:endParaRPr lang="en-US" sz="1300" dirty="0"/>
+          </a:p>
+        </p:txBody>
+      </p:sp>
+      <p:sp>
+        <p:nvSpPr>
+          <p:cNvPr id="19" name="Text 16"/>
+          <p:cNvSpPr/>
+          <p:nvPr/>
+        </p:nvSpPr>
+        <p:spPr>
+          <a:xfrm>
+            <a:off x="1417320" y="4559808"/>
+            <a:ext cx="9174175" cy="1223772"/>
+          </a:xfrm>
+          <a:prstGeom prst="rect">
+            <a:avLst/>
+          </a:prstGeom>
+          <a:noFill/>
+          <a:ln/>
+        </p:spPr>
+        <p:txBody>
+          <a:bodyPr wrap="square" lIns="0" tIns="0" rIns="0" bIns="0" rtlCol="0" anchor="t">
+            <a:normAutofit/>
+          </a:bodyPr>
+          <a:lstStyle/>
+          <a:p>
+            <a:pPr indent="0" marL="0">
+              <a:lnSpc>
+                <a:spcPct val="105000"/>
+              </a:lnSpc>
+              <a:buNone/>
+            </a:pPr>
+            <a:r>
+              <a:rPr lang="en-US" sz="2200" dirty="0">
+                <a:solidFill>
+                  <a:srgbClr val="F2F0EA"/>
+                </a:solidFill>
+                <a:latin typeface="Arial" pitchFamily="34" charset="0"/>
+                <a:ea typeface="Arial" pitchFamily="34" charset="-122"/>
+                <a:cs typeface="Arial" pitchFamily="34" charset="-120"/>
+              </a:rPr>
+              <a:t>No capítulo XXV, Blimunda chega a Lisboa em jejum, vê a vontade de Baltasar num auto de fé e chama-a: a vontade fica na terra, com ela.</a:t>
+            </a:r>
+            <a:endParaRPr lang="en-US" sz="2200" dirty="0"/>
+          </a:p>
+        </p:txBody>
+      </p:sp>
+    </p:spTree>
+  </p:cSld>
+  <p:clrMapOvr>
+    <a:masterClrMapping/>
+  </p:clrMapOvr>
+</p:sld>
+</file>
+
+<file path=ppt/slides/slide11.xml><?xml version="1.0" encoding="utf-8"?>
+<p:sld xmlns:a="http://schemas.openxmlformats.org/drawingml/2006/main" xmlns:r="http://schemas.openxmlformats.org/officeDocument/2006/relationships" xmlns:p="http://schemas.openxmlformats.org/presentationml/2006/main">
+  <p:cSld name="Slide 11">
+    <p:bg>
+      <p:bgPr>
+        <a:solidFill>
+          <a:srgbClr val="111111"/>
+        </a:solidFill>
+      </p:bgPr>
+    </p:bg>
+    <p:spTree>
+      <p:nvGrpSpPr>
+        <p:cNvPr id="1" name=""/>
+        <p:cNvGrpSpPr/>
+        <p:nvPr/>
+      </p:nvGrpSpPr>
+      <p:grpSpPr>
+        <a:xfrm>
+          <a:off x="0" y="0"/>
+          <a:ext cx="0" cy="0"/>
+          <a:chOff x="0" y="0"/>
+          <a:chExt cx="0" cy="0"/>
+        </a:xfrm>
+      </p:grpSpPr>
+      <p:sp>
+        <p:nvSpPr>
+          <p:cNvPr id="3" name="Text 0"/>
+          <p:cNvSpPr/>
+          <p:nvPr/>
+        </p:nvSpPr>
+        <p:spPr>
+          <a:xfrm>
+            <a:off x="10637215" y="384048"/>
+            <a:ext cx="731520" cy="365760"/>
+          </a:xfrm>
+          <a:prstGeom prst="rect">
+            <a:avLst/>
+          </a:prstGeom>
+          <a:noFill/>
+          <a:ln/>
+        </p:spPr>
+        <p:txBody>
+          <a:bodyPr wrap="square" lIns="0" tIns="0" rIns="0" bIns="0" rtlCol="0" anchor="ctr"/>
+          <a:lstStyle/>
+          <a:p>
+            <a:pPr algn="r" indent="0" marL="0">
+              <a:buNone/>
+            </a:pPr>
+            <a:r>
+              <a:rPr lang="en-US" sz="1200" b="1" spc="300" kern="0" dirty="0">
+                <a:solidFill>
+                  <a:srgbClr val="A9A79F"/>
+                </a:solidFill>
+                <a:latin typeface="Arial" pitchFamily="34" charset="0"/>
+                <a:ea typeface="Arial" pitchFamily="34" charset="-122"/>
+                <a:cs typeface="Arial" pitchFamily="34" charset="-120"/>
+              </a:rPr>
+              <a:t>EPI</a:t>
+            </a:r>
+            <a:endParaRPr lang="en-US" sz="1200" dirty="0"/>
+          </a:p>
+        </p:txBody>
+      </p:sp>
+      <p:sp>
+        <p:nvSpPr>
+          <p:cNvPr id="4" name="Text 1"/>
+          <p:cNvSpPr/>
+          <p:nvPr/>
+        </p:nvSpPr>
+        <p:spPr>
+          <a:xfrm>
+            <a:off x="822960" y="6400800"/>
+            <a:ext cx="9631375" cy="274320"/>
+          </a:xfrm>
+          <a:prstGeom prst="rect">
+            <a:avLst/>
+          </a:prstGeom>
+          <a:noFill/>
+          <a:ln/>
+        </p:spPr>
+        <p:txBody>
+          <a:bodyPr wrap="square" lIns="0" tIns="0" rIns="0" bIns="0" rtlCol="0" anchor="ctr"/>
+          <a:lstStyle/>
+          <a:p>
+            <a:pPr indent="0" marL="0">
+              <a:buNone/>
+            </a:pPr>
+            <a:r>
+              <a:rPr lang="en-US" sz="1000" dirty="0">
+                <a:solidFill>
+                  <a:srgbClr val="A9A79F"/>
+                </a:solidFill>
+                <a:latin typeface="Arial" pitchFamily="34" charset="0"/>
+                <a:ea typeface="Arial" pitchFamily="34" charset="-122"/>
+                <a:cs typeface="Arial" pitchFamily="34" charset="-120"/>
+              </a:rPr>
+              <a:t>Lição M9-F02, Ver e não ver</a:t>
+            </a:r>
+            <a:endParaRPr lang="en-US" sz="1000" dirty="0"/>
+          </a:p>
+        </p:txBody>
+      </p:sp>
+      <p:sp>
+        <p:nvSpPr>
+          <p:cNvPr id="5" name="Text 2"/>
+          <p:cNvSpPr/>
+          <p:nvPr/>
+        </p:nvSpPr>
+        <p:spPr>
+          <a:xfrm>
+            <a:off x="10637215" y="6400800"/>
+            <a:ext cx="731520" cy="274320"/>
+          </a:xfrm>
+          <a:prstGeom prst="rect">
+            <a:avLst/>
+          </a:prstGeom>
+          <a:noFill/>
+          <a:ln/>
+        </p:spPr>
+        <p:txBody>
+          <a:bodyPr wrap="square" lIns="0" tIns="0" rIns="0" bIns="0" rtlCol="0" anchor="ctr"/>
+          <a:lstStyle/>
+          <a:p>
+            <a:pPr algn="r" indent="0" marL="0">
+              <a:buNone/>
+            </a:pPr>
+            <a:r>
+              <a:rPr lang="en-US" sz="1000" dirty="0">
+                <a:solidFill>
+                  <a:srgbClr val="A9A79F"/>
+                </a:solidFill>
+                <a:latin typeface="Arial" pitchFamily="34" charset="0"/>
+                <a:ea typeface="Arial" pitchFamily="34" charset="-122"/>
+                <a:cs typeface="Arial" pitchFamily="34" charset="-120"/>
+              </a:rPr>
+              <a:t>11</a:t>
+            </a:r>
+            <a:endParaRPr lang="en-US" sz="1000" dirty="0"/>
+          </a:p>
+        </p:txBody>
+      </p:sp>
+      <p:sp>
+        <p:nvSpPr>
+          <p:cNvPr id="6" name="Shape 3"/>
+          <p:cNvSpPr/>
+          <p:nvPr/>
+        </p:nvSpPr>
+        <p:spPr>
+          <a:xfrm>
+            <a:off x="822960" y="502920"/>
+            <a:ext cx="201168" cy="201168"/>
+          </a:xfrm>
+          <a:prstGeom prst="triangle">
+            <a:avLst/>
+          </a:prstGeom>
+          <a:ln w="19050">
+            <a:solidFill>
+              <a:srgbClr val="F2F0EA"/>
+            </a:solidFill>
+            <a:prstDash val="solid"/>
+          </a:ln>
+        </p:spPr>
+      </p:sp>
+      <p:sp>
+        <p:nvSpPr>
+          <p:cNvPr id="7" name="Text 4"/>
+          <p:cNvSpPr/>
+          <p:nvPr/>
+        </p:nvSpPr>
+        <p:spPr>
+          <a:xfrm>
+            <a:off x="1188720" y="457200"/>
+            <a:ext cx="9448495" cy="292608"/>
+          </a:xfrm>
+          <a:prstGeom prst="rect">
+            <a:avLst/>
+          </a:prstGeom>
+          <a:noFill/>
+          <a:ln/>
+        </p:spPr>
+        <p:txBody>
+          <a:bodyPr wrap="square" lIns="0" tIns="0" rIns="0" bIns="0" rtlCol="0" anchor="ctr"/>
+          <a:lstStyle/>
+          <a:p>
+            <a:pPr indent="0" marL="0">
+              <a:buNone/>
+            </a:pPr>
+            <a:r>
+              <a:rPr lang="en-US" sz="1100" b="1" spc="250" kern="0" dirty="0">
+                <a:solidFill>
+                  <a:srgbClr val="A9A79F"/>
+                </a:solidFill>
+                <a:latin typeface="Arial" pitchFamily="34" charset="0"/>
+                <a:ea typeface="Arial" pitchFamily="34" charset="-122"/>
+                <a:cs typeface="Arial" pitchFamily="34" charset="-120"/>
+              </a:rPr>
               <a:t>ATÉ À PRÓXIMA AULA</a:t>
             </a:r>
             <a:endParaRPr lang="en-US" sz="1100" dirty="0"/>
@@ -2433,9 +3057,34 @@
           </a:p>
         </p:txBody>
       </p:sp>
-      <p:sp>
-        <p:nvSpPr>
-          <p:cNvPr id="6" name="Shape 3"/>
+      <p:pic>
+        <p:nvPicPr>
+          <p:cNvPr id="6" name="Image 0" descr="/home/user/epi-portugues-fontes/_interno/biblioteca-imagens/fontes/mafra-biblioteca.jpg">    </p:cNvPr>
+          <p:cNvPicPr>
+            <a:picLocks noChangeAspect="1"/>
+          </p:cNvPicPr>
+          <p:nvPr/>
+        </p:nvPicPr>
+        <p:blipFill>
+          <a:blip r:embed="rId1">
+            <a:alphaModFix amt="8000"/>
+          </a:blip>
+          <a:srcRect l="0" r="0" t="0" b="0"/>
+          <a:stretch/>
+        </p:blipFill>
+        <p:spPr>
+          <a:xfrm>
+            <a:off x="0" y="0"/>
+            <a:ext cx="12191695" cy="6858000"/>
+          </a:xfrm>
+          <a:prstGeom prst="rect">
+            <a:avLst/>
+          </a:prstGeom>
+        </p:spPr>
+      </p:pic>
+      <p:sp>
+        <p:nvSpPr>
+          <p:cNvPr id="7" name="Shape 3"/>
           <p:cNvSpPr/>
           <p:nvPr/>
         </p:nvSpPr>
@@ -2457,7 +3106,7 @@
       </p:sp>
       <p:sp>
         <p:nvSpPr>
-          <p:cNvPr id="7" name="Text 4"/>
+          <p:cNvPr id="8" name="Text 4"/>
           <p:cNvSpPr/>
           <p:nvPr/>
         </p:nvSpPr>
@@ -2488,7 +3137,7 @@
                 <a:ea typeface="Arial" pitchFamily="34" charset="-122"/>
                 <a:cs typeface="Arial" pitchFamily="34" charset="-120"/>
               </a:rPr>
-              <a:t>LER, NA FOLHA</a:t>
+              <a:t>LER: O VOO DA PASSAROLA</a:t>
             </a:r>
             <a:endParaRPr lang="en-US" sz="1100" dirty="0"/>
           </a:p>
@@ -2496,167 +3145,14 @@
       </p:sp>
       <p:sp>
         <p:nvSpPr>
-          <p:cNvPr id="8" name="Text 5"/>
-          <p:cNvSpPr/>
-          <p:nvPr/>
-        </p:nvSpPr>
-        <p:spPr>
-          <a:xfrm>
-            <a:off x="822960" y="868680"/>
-            <a:ext cx="9814255" cy="822960"/>
-          </a:xfrm>
-          <a:prstGeom prst="rect">
-            <a:avLst/>
-          </a:prstGeom>
-          <a:noFill/>
-          <a:ln/>
-        </p:spPr>
-        <p:txBody>
-          <a:bodyPr wrap="square" lIns="0" tIns="0" rIns="0" bIns="0" rtlCol="0" anchor="b">
-            <a:normAutofit/>
-          </a:bodyPr>
-          <a:lstStyle/>
-          <a:p>
-            <a:pPr indent="0" marL="0">
-              <a:buNone/>
-            </a:pPr>
-            <a:r>
-              <a:rPr lang="en-US" sz="3400" dirty="0">
-                <a:solidFill>
-                  <a:srgbClr val="F2F0EA"/>
-                </a:solidFill>
-                <a:latin typeface="Arial" pitchFamily="34" charset="0"/>
-                <a:ea typeface="Arial" pitchFamily="34" charset="-122"/>
-                <a:cs typeface="Arial" pitchFamily="34" charset="-120"/>
-              </a:rPr>
-              <a:t>Os textos leem-se na folha</a:t>
-            </a:r>
-            <a:endParaRPr lang="en-US" sz="3400" dirty="0"/>
-          </a:p>
-        </p:txBody>
-      </p:sp>
-      <p:sp>
-        <p:nvSpPr>
-          <p:cNvPr id="9" name="Shape 6"/>
-          <p:cNvSpPr/>
-          <p:nvPr/>
-        </p:nvSpPr>
-        <p:spPr>
-          <a:xfrm>
-            <a:off x="822960" y="1746504"/>
-            <a:ext cx="640080" cy="64008"/>
-          </a:xfrm>
-          <a:prstGeom prst="rect">
-            <a:avLst/>
-          </a:prstGeom>
-          <a:solidFill>
-            <a:srgbClr val="E4555C"/>
-          </a:solidFill>
-          <a:ln w="12700">
-            <a:solidFill>
-              <a:srgbClr val="E4555C"/>
-            </a:solidFill>
-            <a:prstDash val="solid"/>
-          </a:ln>
-        </p:spPr>
-      </p:sp>
-      <p:sp>
-        <p:nvSpPr>
-          <p:cNvPr id="10" name="Shape 7"/>
-          <p:cNvSpPr/>
-          <p:nvPr/>
-        </p:nvSpPr>
-        <p:spPr>
-          <a:xfrm>
-            <a:off x="1005840" y="2286000"/>
-            <a:ext cx="0" cy="1316736"/>
-          </a:xfrm>
-          <a:prstGeom prst="line">
-            <a:avLst/>
-          </a:prstGeom>
-          <a:noFill/>
-          <a:ln w="12700">
-            <a:solidFill>
-              <a:srgbClr val="A9A79F"/>
-            </a:solidFill>
-            <a:prstDash val="solid"/>
-          </a:ln>
-        </p:spPr>
-      </p:sp>
-      <p:sp>
-        <p:nvSpPr>
-          <p:cNvPr id="11" name="Shape 8"/>
-          <p:cNvSpPr/>
-          <p:nvPr/>
-        </p:nvSpPr>
-        <p:spPr>
-          <a:xfrm>
-            <a:off x="822960" y="2103120"/>
-            <a:ext cx="365760" cy="365760"/>
-          </a:xfrm>
-          <a:prstGeom prst="ellipse">
-            <a:avLst/>
-          </a:prstGeom>
-          <a:solidFill>
-            <a:srgbClr val="111111"/>
-          </a:solidFill>
-          <a:ln w="15875">
-            <a:solidFill>
-              <a:srgbClr val="F2F0EA"/>
-            </a:solidFill>
-            <a:prstDash val="solid"/>
-          </a:ln>
-        </p:spPr>
-      </p:sp>
-      <p:sp>
-        <p:nvSpPr>
-          <p:cNvPr id="12" name="Text 9"/>
-          <p:cNvSpPr/>
-          <p:nvPr/>
-        </p:nvSpPr>
-        <p:spPr>
-          <a:xfrm>
-            <a:off x="822960" y="2103120"/>
-            <a:ext cx="365760" cy="365760"/>
-          </a:xfrm>
-          <a:prstGeom prst="rect">
-            <a:avLst/>
-          </a:prstGeom>
-          <a:noFill/>
-          <a:ln/>
-        </p:spPr>
-        <p:txBody>
-          <a:bodyPr wrap="square" lIns="0" tIns="0" rIns="0" bIns="0" rtlCol="0" anchor="ctr"/>
-          <a:lstStyle/>
-          <a:p>
-            <a:pPr algn="ctr" indent="0" marL="0">
-              <a:buNone/>
-            </a:pPr>
-            <a:r>
-              <a:rPr lang="en-US" sz="1300" b="1" dirty="0">
-                <a:solidFill>
-                  <a:srgbClr val="F2F0EA"/>
-                </a:solidFill>
-                <a:latin typeface="Arial" pitchFamily="34" charset="0"/>
-                <a:ea typeface="Arial" pitchFamily="34" charset="-122"/>
-                <a:cs typeface="Arial" pitchFamily="34" charset="-120"/>
-              </a:rPr>
-              <a:t>1</a:t>
-            </a:r>
-            <a:endParaRPr lang="en-US" sz="1300" dirty="0"/>
-          </a:p>
-        </p:txBody>
-      </p:sp>
-      <p:sp>
-        <p:nvSpPr>
-          <p:cNvPr id="13" name="Text 10"/>
-          <p:cNvSpPr/>
-          <p:nvPr/>
-        </p:nvSpPr>
-        <p:spPr>
-          <a:xfrm>
-            <a:off x="1417320" y="2112264"/>
-            <a:ext cx="9174175" cy="1316736"/>
+          <p:cNvPr id="9" name="Text 5"/>
+          <p:cNvSpPr/>
+          <p:nvPr/>
+        </p:nvSpPr>
+        <p:spPr>
+          <a:xfrm>
+            <a:off x="822960" y="1005840"/>
+            <a:ext cx="9814255" cy="4937760"/>
           </a:xfrm>
           <a:prstGeom prst="rect">
             <a:avLst/>
@@ -2672,170 +3168,63 @@
           <a:p>
             <a:pPr indent="0" marL="0">
               <a:lnSpc>
-                <a:spcPct val="105000"/>
+                <a:spcPct val="125000"/>
               </a:lnSpc>
               <a:buNone/>
             </a:pPr>
             <a:r>
-              <a:rPr lang="en-US" sz="2400" dirty="0">
+              <a:rPr lang="en-US" sz="2200" dirty="0">
                 <a:solidFill>
                   <a:srgbClr val="F2F0EA"/>
                 </a:solidFill>
-                <a:latin typeface="Arial" pitchFamily="34" charset="0"/>
-                <a:ea typeface="Arial" pitchFamily="34" charset="-122"/>
-                <a:cs typeface="Arial" pitchFamily="34" charset="-120"/>
-              </a:rPr>
-              <a:t>O voo da passarola</a:t>
-            </a:r>
-            <a:endParaRPr lang="en-US" sz="2400" dirty="0"/>
-          </a:p>
-          <a:p>
-            <a:pPr indent="0" marL="0">
-              <a:lnSpc>
-                <a:spcPct val="105000"/>
-              </a:lnSpc>
-              <a:buNone/>
-            </a:pPr>
-            <a:r>
-              <a:rPr lang="en-US" sz="2400" dirty="0">
-                <a:solidFill>
-                  <a:srgbClr val="F2F0EA"/>
-                </a:solidFill>
-                <a:latin typeface="Arial" pitchFamily="34" charset="0"/>
-                <a:ea typeface="Arial" pitchFamily="34" charset="-122"/>
-                <a:cs typeface="Arial" pitchFamily="34" charset="-120"/>
-              </a:rPr>
-              <a:t>José Saramago, Memorial do Convento (1982), capítulo XVI. Texto junto pelo docente; grafia da edição.</a:t>
-            </a:r>
-            <a:endParaRPr lang="en-US" sz="2400" dirty="0"/>
-          </a:p>
-        </p:txBody>
-      </p:sp>
-      <p:sp>
-        <p:nvSpPr>
-          <p:cNvPr id="14" name="Shape 11"/>
-          <p:cNvSpPr/>
-          <p:nvPr/>
-        </p:nvSpPr>
-        <p:spPr>
-          <a:xfrm>
-            <a:off x="822960" y="3419856"/>
-            <a:ext cx="365760" cy="365760"/>
-          </a:xfrm>
-          <a:prstGeom prst="ellipse">
-            <a:avLst/>
-          </a:prstGeom>
-          <a:solidFill>
-            <a:srgbClr val="111111"/>
-          </a:solidFill>
-          <a:ln w="15875">
-            <a:solidFill>
-              <a:srgbClr val="F2F0EA"/>
-            </a:solidFill>
-            <a:prstDash val="solid"/>
-          </a:ln>
-        </p:spPr>
-      </p:sp>
-      <p:sp>
-        <p:nvSpPr>
-          <p:cNvPr id="15" name="Text 12"/>
-          <p:cNvSpPr/>
-          <p:nvPr/>
-        </p:nvSpPr>
-        <p:spPr>
-          <a:xfrm>
-            <a:off x="822960" y="3419856"/>
-            <a:ext cx="365760" cy="365760"/>
-          </a:xfrm>
-          <a:prstGeom prst="rect">
-            <a:avLst/>
-          </a:prstGeom>
-          <a:noFill/>
-          <a:ln/>
-        </p:spPr>
-        <p:txBody>
-          <a:bodyPr wrap="square" lIns="0" tIns="0" rIns="0" bIns="0" rtlCol="0" anchor="ctr"/>
-          <a:lstStyle/>
-          <a:p>
-            <a:pPr algn="ctr" indent="0" marL="0">
-              <a:buNone/>
-            </a:pPr>
-            <a:r>
-              <a:rPr lang="en-US" sz="1300" b="1" dirty="0">
-                <a:solidFill>
-                  <a:srgbClr val="F2F0EA"/>
-                </a:solidFill>
-                <a:latin typeface="Arial" pitchFamily="34" charset="0"/>
-                <a:ea typeface="Arial" pitchFamily="34" charset="-122"/>
-                <a:cs typeface="Arial" pitchFamily="34" charset="-120"/>
-              </a:rPr>
-              <a:t>2</a:t>
-            </a:r>
-            <a:endParaRPr lang="en-US" sz="1300" dirty="0"/>
-          </a:p>
-        </p:txBody>
-      </p:sp>
-      <p:sp>
-        <p:nvSpPr>
-          <p:cNvPr id="16" name="Text 13"/>
-          <p:cNvSpPr/>
-          <p:nvPr/>
-        </p:nvSpPr>
-        <p:spPr>
-          <a:xfrm>
-            <a:off x="1417320" y="3429000"/>
-            <a:ext cx="9174175" cy="1316736"/>
-          </a:xfrm>
-          <a:prstGeom prst="rect">
-            <a:avLst/>
-          </a:prstGeom>
-          <a:noFill/>
-          <a:ln/>
-        </p:spPr>
-        <p:txBody>
-          <a:bodyPr wrap="square" lIns="0" tIns="0" rIns="0" bIns="0" rtlCol="0" anchor="t">
+                <a:latin typeface="Georgia" pitchFamily="34" charset="0"/>
+                <a:ea typeface="Georgia" pitchFamily="34" charset="-122"/>
+                <a:cs typeface="Georgia" pitchFamily="34" charset="-120"/>
+              </a:rPr>
+              <a:t>a sua cabeça de gaivota, lançou-se em flecha, céu acima. Sacudidos pelos bruscos volteios, Baltasar e Blimunda tinham caído no chão de tábuas da máquina, mas o padre Bartolomeu Lourenço agarrara-se a um dos prumos que sustentavam as velas, e assim pôde ver afastarse a terra a uma velocidade incrível, já mal se distinguia a quinta, logo perdida entre colinas, e aquilo além, que é, Lisboa, claro está, e o rio, oh, o mar, aquele mar por onde eu, Bartolomeu Lourenço de Gusmão, vim por duas vezes do Brasil, o mar por onde viajei à Holanda, a que mais continentes da terra e do ar me levarás tu, máquina, o vento ruge-me aos ouvidos, nunca ave alguma subiu tão alto se me visse el-rei, se me visse aquele Tomás Pinto Brandão que se riu de mim em verso, se o Santo Ofício me visse, saberiam todos que sou filho predilecto de Deus, eu sim, eu que estou subindo ao céu por obra do meu génio, por obra também dos olhos de Blimunda, se haverá no céu olhos como eles, por obra da mão direita de Baltasar, aqui te levo, Deus um que também não tem a mão esquerda, Blimunda, Baltasar, venham ver, levantem-se daí, não tenham medo. Não tinham medo, estavam apenas assustados com a sua própria coragem. O padre ria, dava gritos, deixara já a segurança do prumo e percorria o convés da máquina de um lado a outro para poder olhar a terra em todos os seus pontos cardeais, tão grande agora que estavam longe dela, enfim levantaram-se Baltasar e Blimunda, agarrando-se nervosamente aos prumos, depois à amurada, deslumbrados de luz e de vento, logo sem nenhum susto, Ah ·e Baltasar gritou, Conseguimos, abraçou-se a Blimunda e desatou a chorar, parecia uma criança perdida, um soldado que andou na guerra, que nos Pegões matou um homem com o seu espigão, e agora soluça de felicidade abraçado a Blimunda, que lhe beija a cara suja, então, então. O padre veio para eles e abraçou-se também, subitamente perturbado por uma analogia, assim dissera o italiano, Deus ele próprio, Baltasar seu filho, Blimunda o Espírito Santo, e estavam os três no céu, Só há um Deus, gritou, mas o vento levou-lhe as palavras da boca. Então Blimunda disse, Se não abrirmos a vela, continuaremos a subir, aonde iremos parar, talvez ao sol.</a:t>
+            </a:r>
+            <a:endParaRPr lang="en-US" sz="2200" dirty="0"/>
+          </a:p>
+        </p:txBody>
+      </p:sp>
+      <p:sp>
+        <p:nvSpPr>
+          <p:cNvPr id="10" name="Text 6"/>
+          <p:cNvSpPr/>
+          <p:nvPr/>
+        </p:nvSpPr>
+        <p:spPr>
+          <a:xfrm>
+            <a:off x="822960" y="6035040"/>
+            <a:ext cx="9814255" cy="292608"/>
+          </a:xfrm>
+          <a:prstGeom prst="rect">
+            <a:avLst/>
+          </a:prstGeom>
+          <a:noFill/>
+          <a:ln/>
+        </p:spPr>
+        <p:txBody>
+          <a:bodyPr wrap="square" lIns="0" tIns="0" rIns="0" bIns="0" rtlCol="0" anchor="ctr">
             <a:normAutofit/>
           </a:bodyPr>
           <a:lstStyle/>
           <a:p>
             <a:pPr indent="0" marL="0">
-              <a:lnSpc>
-                <a:spcPct val="105000"/>
-              </a:lnSpc>
-              <a:buNone/>
-            </a:pPr>
-            <a:r>
-              <a:rPr lang="en-US" sz="2400" dirty="0">
-                <a:solidFill>
-                  <a:srgbClr val="F2F0EA"/>
-                </a:solidFill>
-                <a:latin typeface="Arial" pitchFamily="34" charset="0"/>
-                <a:ea typeface="Arial" pitchFamily="34" charset="-122"/>
-                <a:cs typeface="Arial" pitchFamily="34" charset="-120"/>
-              </a:rPr>
-              <a:t>O reencontro (último capítulo)</a:t>
-            </a:r>
-            <a:endParaRPr lang="en-US" sz="2400" dirty="0"/>
-          </a:p>
-          <a:p>
-            <a:pPr indent="0" marL="0">
-              <a:lnSpc>
-                <a:spcPct val="105000"/>
-              </a:lnSpc>
-              <a:buNone/>
-            </a:pPr>
-            <a:r>
-              <a:rPr lang="en-US" sz="2400" dirty="0">
-                <a:solidFill>
-                  <a:srgbClr val="F2F0EA"/>
-                </a:solidFill>
-                <a:latin typeface="Arial" pitchFamily="34" charset="0"/>
-                <a:ea typeface="Arial" pitchFamily="34" charset="-122"/>
-                <a:cs typeface="Arial" pitchFamily="34" charset="-120"/>
-              </a:rPr>
-              <a:t>José Saramago, Memorial do Convento (1982), último capítulo (excerto).</a:t>
-            </a:r>
-            <a:endParaRPr lang="en-US" sz="2400" dirty="0"/>
+              <a:buNone/>
+            </a:pPr>
+            <a:r>
+              <a:rPr lang="en-US" sz="1200" dirty="0">
+                <a:solidFill>
+                  <a:srgbClr val="A9A79F"/>
+                </a:solidFill>
+                <a:latin typeface="Arial" pitchFamily="34" charset="0"/>
+                <a:ea typeface="Arial" pitchFamily="34" charset="-122"/>
+                <a:cs typeface="Arial" pitchFamily="34" charset="-120"/>
+              </a:rPr>
+              <a:t>José Saramago, Memorial do Convento (1982), capítulo XVI. grafia da edição. Excerto para estudo.</a:t>
+            </a:r>
+            <a:endParaRPr lang="en-US" sz="1200" dirty="0"/>
           </a:p>
         </p:txBody>
       </p:sp>
@@ -2988,9 +3377,34 @@
           </a:p>
         </p:txBody>
       </p:sp>
-      <p:sp>
-        <p:nvSpPr>
-          <p:cNvPr id="6" name="Shape 3"/>
+      <p:pic>
+        <p:nvPicPr>
+          <p:cNvPr id="6" name="Image 0" descr="/home/user/epi-portugues-fontes/_interno/biblioteca-imagens/fontes/mafra-biblioteca.jpg">    </p:cNvPr>
+          <p:cNvPicPr>
+            <a:picLocks noChangeAspect="1"/>
+          </p:cNvPicPr>
+          <p:nvPr/>
+        </p:nvPicPr>
+        <p:blipFill>
+          <a:blip r:embed="rId1">
+            <a:alphaModFix amt="8000"/>
+          </a:blip>
+          <a:srcRect l="0" r="0" t="0" b="0"/>
+          <a:stretch/>
+        </p:blipFill>
+        <p:spPr>
+          <a:xfrm>
+            <a:off x="0" y="0"/>
+            <a:ext cx="12191695" cy="6858000"/>
+          </a:xfrm>
+          <a:prstGeom prst="rect">
+            <a:avLst/>
+          </a:prstGeom>
+        </p:spPr>
+      </p:pic>
+      <p:sp>
+        <p:nvSpPr>
+          <p:cNvPr id="7" name="Shape 3"/>
           <p:cNvSpPr/>
           <p:nvPr/>
         </p:nvSpPr>
@@ -3012,7 +3426,7 @@
       </p:sp>
       <p:sp>
         <p:nvSpPr>
-          <p:cNvPr id="7" name="Text 4"/>
+          <p:cNvPr id="8" name="Text 4"/>
           <p:cNvSpPr/>
           <p:nvPr/>
         </p:nvSpPr>
@@ -3043,7 +3457,7 @@
                 <a:ea typeface="Arial" pitchFamily="34" charset="-122"/>
                 <a:cs typeface="Arial" pitchFamily="34" charset="-120"/>
               </a:rPr>
-              <a:t>O ESSENCIAL</a:t>
+              <a:t>LER: O REENCONTRO (ÚLTIMO CAPÍTULO)</a:t>
             </a:r>
             <a:endParaRPr lang="en-US" sz="1100" dirty="0"/>
           </a:p>
@@ -3051,167 +3465,14 @@
       </p:sp>
       <p:sp>
         <p:nvSpPr>
-          <p:cNvPr id="8" name="Text 5"/>
-          <p:cNvSpPr/>
-          <p:nvPr/>
-        </p:nvSpPr>
-        <p:spPr>
-          <a:xfrm>
-            <a:off x="822960" y="868680"/>
-            <a:ext cx="9814255" cy="822960"/>
-          </a:xfrm>
-          <a:prstGeom prst="rect">
-            <a:avLst/>
-          </a:prstGeom>
-          <a:noFill/>
-          <a:ln/>
-        </p:spPr>
-        <p:txBody>
-          <a:bodyPr wrap="square" lIns="0" tIns="0" rIns="0" bIns="0" rtlCol="0" anchor="b">
-            <a:normAutofit/>
-          </a:bodyPr>
-          <a:lstStyle/>
-          <a:p>
-            <a:pPr indent="0" marL="0">
-              <a:buNone/>
-            </a:pPr>
-            <a:r>
-              <a:rPr lang="en-US" sz="3400" dirty="0">
-                <a:solidFill>
-                  <a:srgbClr val="F2F0EA"/>
-                </a:solidFill>
-                <a:latin typeface="Arial" pitchFamily="34" charset="0"/>
-                <a:ea typeface="Arial" pitchFamily="34" charset="-122"/>
-                <a:cs typeface="Arial" pitchFamily="34" charset="-120"/>
-              </a:rPr>
-              <a:t>Três coisas a fixar</a:t>
-            </a:r>
-            <a:endParaRPr lang="en-US" sz="3400" dirty="0"/>
-          </a:p>
-        </p:txBody>
-      </p:sp>
-      <p:sp>
-        <p:nvSpPr>
-          <p:cNvPr id="9" name="Shape 6"/>
-          <p:cNvSpPr/>
-          <p:nvPr/>
-        </p:nvSpPr>
-        <p:spPr>
-          <a:xfrm>
-            <a:off x="822960" y="1746504"/>
-            <a:ext cx="640080" cy="64008"/>
-          </a:xfrm>
-          <a:prstGeom prst="rect">
-            <a:avLst/>
-          </a:prstGeom>
-          <a:solidFill>
-            <a:srgbClr val="E4555C"/>
-          </a:solidFill>
-          <a:ln w="12700">
-            <a:solidFill>
-              <a:srgbClr val="E4555C"/>
-            </a:solidFill>
-            <a:prstDash val="solid"/>
-          </a:ln>
-        </p:spPr>
-      </p:sp>
-      <p:sp>
-        <p:nvSpPr>
-          <p:cNvPr id="10" name="Shape 7"/>
-          <p:cNvSpPr/>
-          <p:nvPr/>
-        </p:nvSpPr>
-        <p:spPr>
-          <a:xfrm>
-            <a:off x="1005840" y="2286000"/>
-            <a:ext cx="0" cy="2447544"/>
-          </a:xfrm>
-          <a:prstGeom prst="line">
-            <a:avLst/>
-          </a:prstGeom>
-          <a:noFill/>
-          <a:ln w="12700">
-            <a:solidFill>
-              <a:srgbClr val="A9A79F"/>
-            </a:solidFill>
-            <a:prstDash val="solid"/>
-          </a:ln>
-        </p:spPr>
-      </p:sp>
-      <p:sp>
-        <p:nvSpPr>
-          <p:cNvPr id="11" name="Shape 8"/>
-          <p:cNvSpPr/>
-          <p:nvPr/>
-        </p:nvSpPr>
-        <p:spPr>
-          <a:xfrm>
-            <a:off x="822960" y="2103120"/>
-            <a:ext cx="365760" cy="365760"/>
-          </a:xfrm>
-          <a:prstGeom prst="ellipse">
-            <a:avLst/>
-          </a:prstGeom>
-          <a:solidFill>
-            <a:srgbClr val="111111"/>
-          </a:solidFill>
-          <a:ln w="15875">
-            <a:solidFill>
-              <a:srgbClr val="F2F0EA"/>
-            </a:solidFill>
-            <a:prstDash val="solid"/>
-          </a:ln>
-        </p:spPr>
-      </p:sp>
-      <p:sp>
-        <p:nvSpPr>
-          <p:cNvPr id="12" name="Text 9"/>
-          <p:cNvSpPr/>
-          <p:nvPr/>
-        </p:nvSpPr>
-        <p:spPr>
-          <a:xfrm>
-            <a:off x="822960" y="2103120"/>
-            <a:ext cx="365760" cy="365760"/>
-          </a:xfrm>
-          <a:prstGeom prst="rect">
-            <a:avLst/>
-          </a:prstGeom>
-          <a:noFill/>
-          <a:ln/>
-        </p:spPr>
-        <p:txBody>
-          <a:bodyPr wrap="square" lIns="0" tIns="0" rIns="0" bIns="0" rtlCol="0" anchor="ctr"/>
-          <a:lstStyle/>
-          <a:p>
-            <a:pPr algn="ctr" indent="0" marL="0">
-              <a:buNone/>
-            </a:pPr>
-            <a:r>
-              <a:rPr lang="en-US" sz="1300" b="1" dirty="0">
-                <a:solidFill>
-                  <a:srgbClr val="F2F0EA"/>
-                </a:solidFill>
-                <a:latin typeface="Arial" pitchFamily="34" charset="0"/>
-                <a:ea typeface="Arial" pitchFamily="34" charset="-122"/>
-                <a:cs typeface="Arial" pitchFamily="34" charset="-120"/>
-              </a:rPr>
-              <a:t>1</a:t>
-            </a:r>
-            <a:endParaRPr lang="en-US" sz="1300" dirty="0"/>
-          </a:p>
-        </p:txBody>
-      </p:sp>
-      <p:sp>
-        <p:nvSpPr>
-          <p:cNvPr id="13" name="Text 10"/>
-          <p:cNvSpPr/>
-          <p:nvPr/>
-        </p:nvSpPr>
-        <p:spPr>
-          <a:xfrm>
-            <a:off x="1417320" y="2112264"/>
-            <a:ext cx="9174175" cy="1223772"/>
+          <p:cNvPr id="9" name="Text 5"/>
+          <p:cNvSpPr/>
+          <p:nvPr/>
+        </p:nvSpPr>
+        <p:spPr>
+          <a:xfrm>
+            <a:off x="822960" y="1005840"/>
+            <a:ext cx="9814255" cy="4937760"/>
           </a:xfrm>
           <a:prstGeom prst="rect">
             <a:avLst/>
@@ -3227,238 +3488,63 @@
           <a:p>
             <a:pPr indent="0" marL="0">
               <a:lnSpc>
-                <a:spcPct val="105000"/>
+                <a:spcPct val="125000"/>
               </a:lnSpc>
               <a:buNone/>
             </a:pPr>
             <a:r>
-              <a:rPr lang="en-US" sz="2200" dirty="0">
+              <a:rPr lang="en-US" sz="2600" dirty="0">
                 <a:solidFill>
                   <a:srgbClr val="F2F0EA"/>
                 </a:solidFill>
-                <a:latin typeface="Arial" pitchFamily="34" charset="0"/>
-                <a:ea typeface="Arial" pitchFamily="34" charset="-122"/>
-                <a:cs typeface="Arial" pitchFamily="34" charset="-120"/>
-              </a:rPr>
-              <a:t>Baltasar Sete-Sóis tem um gancho no lugar da mão; Blimunda Sete-Luas vê o que está dentro das pessoas, mas só em jejum.</a:t>
-            </a:r>
-            <a:endParaRPr lang="en-US" sz="2200" dirty="0"/>
-          </a:p>
-        </p:txBody>
-      </p:sp>
-      <p:sp>
-        <p:nvSpPr>
-          <p:cNvPr id="14" name="Shape 11"/>
-          <p:cNvSpPr/>
-          <p:nvPr/>
-        </p:nvSpPr>
-        <p:spPr>
-          <a:xfrm>
-            <a:off x="822960" y="3326892"/>
-            <a:ext cx="365760" cy="365760"/>
-          </a:xfrm>
-          <a:prstGeom prst="ellipse">
-            <a:avLst/>
-          </a:prstGeom>
-          <a:solidFill>
-            <a:srgbClr val="111111"/>
-          </a:solidFill>
-          <a:ln w="15875">
-            <a:solidFill>
-              <a:srgbClr val="F2F0EA"/>
-            </a:solidFill>
-            <a:prstDash val="solid"/>
-          </a:ln>
-        </p:spPr>
-      </p:sp>
-      <p:sp>
-        <p:nvSpPr>
-          <p:cNvPr id="15" name="Text 12"/>
-          <p:cNvSpPr/>
-          <p:nvPr/>
-        </p:nvSpPr>
-        <p:spPr>
-          <a:xfrm>
-            <a:off x="822960" y="3326892"/>
-            <a:ext cx="365760" cy="365760"/>
-          </a:xfrm>
-          <a:prstGeom prst="rect">
-            <a:avLst/>
-          </a:prstGeom>
-          <a:noFill/>
-          <a:ln/>
-        </p:spPr>
-        <p:txBody>
-          <a:bodyPr wrap="square" lIns="0" tIns="0" rIns="0" bIns="0" rtlCol="0" anchor="ctr"/>
-          <a:lstStyle/>
-          <a:p>
-            <a:pPr algn="ctr" indent="0" marL="0">
-              <a:buNone/>
-            </a:pPr>
-            <a:r>
-              <a:rPr lang="en-US" sz="1300" b="1" dirty="0">
-                <a:solidFill>
-                  <a:srgbClr val="F2F0EA"/>
-                </a:solidFill>
-                <a:latin typeface="Arial" pitchFamily="34" charset="0"/>
-                <a:ea typeface="Arial" pitchFamily="34" charset="-122"/>
-                <a:cs typeface="Arial" pitchFamily="34" charset="-120"/>
-              </a:rPr>
-              <a:t>2</a:t>
-            </a:r>
-            <a:endParaRPr lang="en-US" sz="1300" dirty="0"/>
-          </a:p>
-        </p:txBody>
-      </p:sp>
-      <p:sp>
-        <p:nvSpPr>
-          <p:cNvPr id="16" name="Text 13"/>
-          <p:cNvSpPr/>
-          <p:nvPr/>
-        </p:nvSpPr>
-        <p:spPr>
-          <a:xfrm>
-            <a:off x="1417320" y="3336036"/>
-            <a:ext cx="9174175" cy="1223772"/>
-          </a:xfrm>
-          <a:prstGeom prst="rect">
-            <a:avLst/>
-          </a:prstGeom>
-          <a:noFill/>
-          <a:ln/>
-        </p:spPr>
-        <p:txBody>
-          <a:bodyPr wrap="square" lIns="0" tIns="0" rIns="0" bIns="0" rtlCol="0" anchor="t">
+                <a:latin typeface="Georgia" pitchFamily="34" charset="0"/>
+                <a:ea typeface="Georgia" pitchFamily="34" charset="-122"/>
+                <a:cs typeface="Georgia" pitchFamily="34" charset="-120"/>
+              </a:rPr>
+              <a:t>São onze os supliciados. A queima já vai adiantada, os rostos mal se distinguem. Naquele extremo arde um homem a quem falta a mão esquerda. Talvez por ter a barba enegrecida, prodígio cosmético da fuligem, parece mais novo. E uma nuvem fechada está no centro do seu corpo. Então Blimunda disse, Vem. Desprendeu-se a vontade de Baltasar Sete-Sóis, mas não subiu para as estrelas, se à terra pertencia e a Blimunda.</a:t>
+            </a:r>
+            <a:endParaRPr lang="en-US" sz="2600" dirty="0"/>
+          </a:p>
+        </p:txBody>
+      </p:sp>
+      <p:sp>
+        <p:nvSpPr>
+          <p:cNvPr id="10" name="Text 6"/>
+          <p:cNvSpPr/>
+          <p:nvPr/>
+        </p:nvSpPr>
+        <p:spPr>
+          <a:xfrm>
+            <a:off x="822960" y="6035040"/>
+            <a:ext cx="9814255" cy="292608"/>
+          </a:xfrm>
+          <a:prstGeom prst="rect">
+            <a:avLst/>
+          </a:prstGeom>
+          <a:noFill/>
+          <a:ln/>
+        </p:spPr>
+        <p:txBody>
+          <a:bodyPr wrap="square" lIns="0" tIns="0" rIns="0" bIns="0" rtlCol="0" anchor="ctr">
             <a:normAutofit/>
           </a:bodyPr>
           <a:lstStyle/>
           <a:p>
             <a:pPr indent="0" marL="0">
-              <a:lnSpc>
-                <a:spcPct val="105000"/>
-              </a:lnSpc>
-              <a:buNone/>
-            </a:pPr>
-            <a:r>
-              <a:rPr lang="en-US" sz="2200" dirty="0">
-                <a:solidFill>
-                  <a:srgbClr val="F2F0EA"/>
-                </a:solidFill>
-                <a:latin typeface="Arial" pitchFamily="34" charset="0"/>
-                <a:ea typeface="Arial" pitchFamily="34" charset="-122"/>
-                <a:cs typeface="Arial" pitchFamily="34" charset="-120"/>
-              </a:rPr>
-              <a:t>Os dois ajudam o padre Bartolomeu Lourenço a construir a passarola, e o romance opõe o ver verdadeiro (lucidez e compaixão) à cegueira do poder.</a:t>
-            </a:r>
-            <a:endParaRPr lang="en-US" sz="2200" dirty="0"/>
-          </a:p>
-        </p:txBody>
-      </p:sp>
-      <p:sp>
-        <p:nvSpPr>
-          <p:cNvPr id="17" name="Shape 14"/>
-          <p:cNvSpPr/>
-          <p:nvPr/>
-        </p:nvSpPr>
-        <p:spPr>
-          <a:xfrm>
-            <a:off x="822960" y="4550664"/>
-            <a:ext cx="365760" cy="365760"/>
-          </a:xfrm>
-          <a:prstGeom prst="ellipse">
-            <a:avLst/>
-          </a:prstGeom>
-          <a:solidFill>
-            <a:srgbClr val="111111"/>
-          </a:solidFill>
-          <a:ln w="15875">
-            <a:solidFill>
-              <a:srgbClr val="F2F0EA"/>
-            </a:solidFill>
-            <a:prstDash val="solid"/>
-          </a:ln>
-        </p:spPr>
-      </p:sp>
-      <p:sp>
-        <p:nvSpPr>
-          <p:cNvPr id="18" name="Text 15"/>
-          <p:cNvSpPr/>
-          <p:nvPr/>
-        </p:nvSpPr>
-        <p:spPr>
-          <a:xfrm>
-            <a:off x="822960" y="4550664"/>
-            <a:ext cx="365760" cy="365760"/>
-          </a:xfrm>
-          <a:prstGeom prst="rect">
-            <a:avLst/>
-          </a:prstGeom>
-          <a:noFill/>
-          <a:ln/>
-        </p:spPr>
-        <p:txBody>
-          <a:bodyPr wrap="square" lIns="0" tIns="0" rIns="0" bIns="0" rtlCol="0" anchor="ctr"/>
-          <a:lstStyle/>
-          <a:p>
-            <a:pPr algn="ctr" indent="0" marL="0">
-              <a:buNone/>
-            </a:pPr>
-            <a:r>
-              <a:rPr lang="en-US" sz="1300" b="1" dirty="0">
-                <a:solidFill>
-                  <a:srgbClr val="F2F0EA"/>
-                </a:solidFill>
-                <a:latin typeface="Arial" pitchFamily="34" charset="0"/>
-                <a:ea typeface="Arial" pitchFamily="34" charset="-122"/>
-                <a:cs typeface="Arial" pitchFamily="34" charset="-120"/>
-              </a:rPr>
-              <a:t>3</a:t>
-            </a:r>
-            <a:endParaRPr lang="en-US" sz="1300" dirty="0"/>
-          </a:p>
-        </p:txBody>
-      </p:sp>
-      <p:sp>
-        <p:nvSpPr>
-          <p:cNvPr id="19" name="Text 16"/>
-          <p:cNvSpPr/>
-          <p:nvPr/>
-        </p:nvSpPr>
-        <p:spPr>
-          <a:xfrm>
-            <a:off x="1417320" y="4559808"/>
-            <a:ext cx="9174175" cy="1564640"/>
-          </a:xfrm>
-          <a:prstGeom prst="rect">
-            <a:avLst/>
-          </a:prstGeom>
-          <a:noFill/>
-          <a:ln/>
-        </p:spPr>
-        <p:txBody>
-          <a:bodyPr wrap="square" lIns="0" tIns="0" rIns="0" bIns="0" rtlCol="0" anchor="t">
-            <a:normAutofit/>
-          </a:bodyPr>
-          <a:lstStyle/>
-          <a:p>
-            <a:pPr indent="0" marL="0">
-              <a:lnSpc>
-                <a:spcPct val="105000"/>
-              </a:lnSpc>
-              <a:buNone/>
-            </a:pPr>
-            <a:r>
-              <a:rPr lang="en-US" sz="2200" dirty="0">
-                <a:solidFill>
-                  <a:srgbClr val="F2F0EA"/>
-                </a:solidFill>
-                <a:latin typeface="Arial" pitchFamily="34" charset="0"/>
-                <a:ea typeface="Arial" pitchFamily="34" charset="-122"/>
-                <a:cs typeface="Arial" pitchFamily="34" charset="-120"/>
-              </a:rPr>
-              <a:t>Ficas a caracterizar as personagens com a página de cada prova, a ler o voo da passarola e o reencontro do último capítulo, e a comparar a passarola e o convento como projetos.</a:t>
-            </a:r>
-            <a:endParaRPr lang="en-US" sz="2200" dirty="0"/>
+              <a:buNone/>
+            </a:pPr>
+            <a:r>
+              <a:rPr lang="en-US" sz="1200" dirty="0">
+                <a:solidFill>
+                  <a:srgbClr val="A9A79F"/>
+                </a:solidFill>
+                <a:latin typeface="Arial" pitchFamily="34" charset="0"/>
+                <a:ea typeface="Arial" pitchFamily="34" charset="-122"/>
+                <a:cs typeface="Arial" pitchFamily="34" charset="-120"/>
+              </a:rPr>
+              <a:t>José Saramago, Memorial do Convento (1982), último capítulo (excerto). Excerto para estudo.</a:t>
+            </a:r>
+            <a:endParaRPr lang="en-US" sz="1200" dirty="0"/>
           </a:p>
         </p:txBody>
       </p:sp>
@@ -3622,7 +3708,7 @@
             <a:off x="822960" y="502920"/>
             <a:ext cx="201168" cy="201168"/>
           </a:xfrm>
-          <a:prstGeom prst="rect">
+          <a:prstGeom prst="ellipse">
             <a:avLst/>
           </a:prstGeom>
           <a:ln w="19050">
@@ -3666,7 +3752,7 @@
                 <a:ea typeface="Arial" pitchFamily="34" charset="-122"/>
                 <a:cs typeface="Arial" pitchFamily="34" charset="-120"/>
               </a:rPr>
-              <a:t>VER, E COMPLETAR NO CADERNO</a:t>
+              <a:t>O ESSENCIAL</a:t>
             </a:r>
             <a:endParaRPr lang="en-US" sz="1100" dirty="0"/>
           </a:p>
@@ -3707,7 +3793,7 @@
                 <a:ea typeface="Arial" pitchFamily="34" charset="-122"/>
                 <a:cs typeface="Arial" pitchFamily="34" charset="-120"/>
               </a:rPr>
-              <a:t>Completa no caderno</a:t>
+              <a:t>Três coisas a fixar</a:t>
             </a:r>
             <a:endParaRPr lang="en-US" sz="3400" dirty="0"/>
           </a:p>
@@ -3738,9 +3824,632 @@
           </a:ln>
         </p:spPr>
       </p:sp>
+      <p:sp>
+        <p:nvSpPr>
+          <p:cNvPr id="10" name="Shape 7"/>
+          <p:cNvSpPr/>
+          <p:nvPr/>
+        </p:nvSpPr>
+        <p:spPr>
+          <a:xfrm>
+            <a:off x="1005840" y="2286000"/>
+            <a:ext cx="0" cy="2447544"/>
+          </a:xfrm>
+          <a:prstGeom prst="line">
+            <a:avLst/>
+          </a:prstGeom>
+          <a:noFill/>
+          <a:ln w="12700">
+            <a:solidFill>
+              <a:srgbClr val="A9A79F"/>
+            </a:solidFill>
+            <a:prstDash val="solid"/>
+          </a:ln>
+        </p:spPr>
+      </p:sp>
+      <p:sp>
+        <p:nvSpPr>
+          <p:cNvPr id="11" name="Shape 8"/>
+          <p:cNvSpPr/>
+          <p:nvPr/>
+        </p:nvSpPr>
+        <p:spPr>
+          <a:xfrm>
+            <a:off x="822960" y="2103120"/>
+            <a:ext cx="365760" cy="365760"/>
+          </a:xfrm>
+          <a:prstGeom prst="ellipse">
+            <a:avLst/>
+          </a:prstGeom>
+          <a:solidFill>
+            <a:srgbClr val="111111"/>
+          </a:solidFill>
+          <a:ln w="15875">
+            <a:solidFill>
+              <a:srgbClr val="F2F0EA"/>
+            </a:solidFill>
+            <a:prstDash val="solid"/>
+          </a:ln>
+        </p:spPr>
+      </p:sp>
+      <p:sp>
+        <p:nvSpPr>
+          <p:cNvPr id="12" name="Text 9"/>
+          <p:cNvSpPr/>
+          <p:nvPr/>
+        </p:nvSpPr>
+        <p:spPr>
+          <a:xfrm>
+            <a:off x="822960" y="2103120"/>
+            <a:ext cx="365760" cy="365760"/>
+          </a:xfrm>
+          <a:prstGeom prst="rect">
+            <a:avLst/>
+          </a:prstGeom>
+          <a:noFill/>
+          <a:ln/>
+        </p:spPr>
+        <p:txBody>
+          <a:bodyPr wrap="square" lIns="0" tIns="0" rIns="0" bIns="0" rtlCol="0" anchor="ctr"/>
+          <a:lstStyle/>
+          <a:p>
+            <a:pPr algn="ctr" indent="0" marL="0">
+              <a:buNone/>
+            </a:pPr>
+            <a:r>
+              <a:rPr lang="en-US" sz="1300" b="1" dirty="0">
+                <a:solidFill>
+                  <a:srgbClr val="F2F0EA"/>
+                </a:solidFill>
+                <a:latin typeface="Arial" pitchFamily="34" charset="0"/>
+                <a:ea typeface="Arial" pitchFamily="34" charset="-122"/>
+                <a:cs typeface="Arial" pitchFamily="34" charset="-120"/>
+              </a:rPr>
+              <a:t>1</a:t>
+            </a:r>
+            <a:endParaRPr lang="en-US" sz="1300" dirty="0"/>
+          </a:p>
+        </p:txBody>
+      </p:sp>
+      <p:sp>
+        <p:nvSpPr>
+          <p:cNvPr id="13" name="Text 10"/>
+          <p:cNvSpPr/>
+          <p:nvPr/>
+        </p:nvSpPr>
+        <p:spPr>
+          <a:xfrm>
+            <a:off x="1417320" y="2112264"/>
+            <a:ext cx="9174175" cy="1223772"/>
+          </a:xfrm>
+          <a:prstGeom prst="rect">
+            <a:avLst/>
+          </a:prstGeom>
+          <a:noFill/>
+          <a:ln/>
+        </p:spPr>
+        <p:txBody>
+          <a:bodyPr wrap="square" lIns="0" tIns="0" rIns="0" bIns="0" rtlCol="0" anchor="t">
+            <a:normAutofit/>
+          </a:bodyPr>
+          <a:lstStyle/>
+          <a:p>
+            <a:pPr indent="0" marL="0">
+              <a:lnSpc>
+                <a:spcPct val="105000"/>
+              </a:lnSpc>
+              <a:buNone/>
+            </a:pPr>
+            <a:r>
+              <a:rPr lang="en-US" sz="2200" dirty="0">
+                <a:solidFill>
+                  <a:srgbClr val="F2F0EA"/>
+                </a:solidFill>
+                <a:latin typeface="Arial" pitchFamily="34" charset="0"/>
+                <a:ea typeface="Arial" pitchFamily="34" charset="-122"/>
+                <a:cs typeface="Arial" pitchFamily="34" charset="-120"/>
+              </a:rPr>
+              <a:t>Baltasar Sete-Sóis tem um gancho no lugar da mão; Blimunda Sete-Luas vê o que está dentro das pessoas, mas só em jejum.</a:t>
+            </a:r>
+            <a:endParaRPr lang="en-US" sz="2200" dirty="0"/>
+          </a:p>
+        </p:txBody>
+      </p:sp>
+      <p:sp>
+        <p:nvSpPr>
+          <p:cNvPr id="14" name="Shape 11"/>
+          <p:cNvSpPr/>
+          <p:nvPr/>
+        </p:nvSpPr>
+        <p:spPr>
+          <a:xfrm>
+            <a:off x="822960" y="3326892"/>
+            <a:ext cx="365760" cy="365760"/>
+          </a:xfrm>
+          <a:prstGeom prst="ellipse">
+            <a:avLst/>
+          </a:prstGeom>
+          <a:solidFill>
+            <a:srgbClr val="111111"/>
+          </a:solidFill>
+          <a:ln w="15875">
+            <a:solidFill>
+              <a:srgbClr val="F2F0EA"/>
+            </a:solidFill>
+            <a:prstDash val="solid"/>
+          </a:ln>
+        </p:spPr>
+      </p:sp>
+      <p:sp>
+        <p:nvSpPr>
+          <p:cNvPr id="15" name="Text 12"/>
+          <p:cNvSpPr/>
+          <p:nvPr/>
+        </p:nvSpPr>
+        <p:spPr>
+          <a:xfrm>
+            <a:off x="822960" y="3326892"/>
+            <a:ext cx="365760" cy="365760"/>
+          </a:xfrm>
+          <a:prstGeom prst="rect">
+            <a:avLst/>
+          </a:prstGeom>
+          <a:noFill/>
+          <a:ln/>
+        </p:spPr>
+        <p:txBody>
+          <a:bodyPr wrap="square" lIns="0" tIns="0" rIns="0" bIns="0" rtlCol="0" anchor="ctr"/>
+          <a:lstStyle/>
+          <a:p>
+            <a:pPr algn="ctr" indent="0" marL="0">
+              <a:buNone/>
+            </a:pPr>
+            <a:r>
+              <a:rPr lang="en-US" sz="1300" b="1" dirty="0">
+                <a:solidFill>
+                  <a:srgbClr val="F2F0EA"/>
+                </a:solidFill>
+                <a:latin typeface="Arial" pitchFamily="34" charset="0"/>
+                <a:ea typeface="Arial" pitchFamily="34" charset="-122"/>
+                <a:cs typeface="Arial" pitchFamily="34" charset="-120"/>
+              </a:rPr>
+              <a:t>2</a:t>
+            </a:r>
+            <a:endParaRPr lang="en-US" sz="1300" dirty="0"/>
+          </a:p>
+        </p:txBody>
+      </p:sp>
+      <p:sp>
+        <p:nvSpPr>
+          <p:cNvPr id="16" name="Text 13"/>
+          <p:cNvSpPr/>
+          <p:nvPr/>
+        </p:nvSpPr>
+        <p:spPr>
+          <a:xfrm>
+            <a:off x="1417320" y="3336036"/>
+            <a:ext cx="9174175" cy="1223772"/>
+          </a:xfrm>
+          <a:prstGeom prst="rect">
+            <a:avLst/>
+          </a:prstGeom>
+          <a:noFill/>
+          <a:ln/>
+        </p:spPr>
+        <p:txBody>
+          <a:bodyPr wrap="square" lIns="0" tIns="0" rIns="0" bIns="0" rtlCol="0" anchor="t">
+            <a:normAutofit/>
+          </a:bodyPr>
+          <a:lstStyle/>
+          <a:p>
+            <a:pPr indent="0" marL="0">
+              <a:lnSpc>
+                <a:spcPct val="105000"/>
+              </a:lnSpc>
+              <a:buNone/>
+            </a:pPr>
+            <a:r>
+              <a:rPr lang="en-US" sz="2200" dirty="0">
+                <a:solidFill>
+                  <a:srgbClr val="F2F0EA"/>
+                </a:solidFill>
+                <a:latin typeface="Arial" pitchFamily="34" charset="0"/>
+                <a:ea typeface="Arial" pitchFamily="34" charset="-122"/>
+                <a:cs typeface="Arial" pitchFamily="34" charset="-120"/>
+              </a:rPr>
+              <a:t>Os dois ajudam o padre Bartolomeu Lourenço a construir a passarola, e o romance opõe o ver verdadeiro (lucidez e compaixão) à cegueira do poder.</a:t>
+            </a:r>
+            <a:endParaRPr lang="en-US" sz="2200" dirty="0"/>
+          </a:p>
+        </p:txBody>
+      </p:sp>
+      <p:sp>
+        <p:nvSpPr>
+          <p:cNvPr id="17" name="Shape 14"/>
+          <p:cNvSpPr/>
+          <p:nvPr/>
+        </p:nvSpPr>
+        <p:spPr>
+          <a:xfrm>
+            <a:off x="822960" y="4550664"/>
+            <a:ext cx="365760" cy="365760"/>
+          </a:xfrm>
+          <a:prstGeom prst="ellipse">
+            <a:avLst/>
+          </a:prstGeom>
+          <a:solidFill>
+            <a:srgbClr val="111111"/>
+          </a:solidFill>
+          <a:ln w="15875">
+            <a:solidFill>
+              <a:srgbClr val="F2F0EA"/>
+            </a:solidFill>
+            <a:prstDash val="solid"/>
+          </a:ln>
+        </p:spPr>
+      </p:sp>
+      <p:sp>
+        <p:nvSpPr>
+          <p:cNvPr id="18" name="Text 15"/>
+          <p:cNvSpPr/>
+          <p:nvPr/>
+        </p:nvSpPr>
+        <p:spPr>
+          <a:xfrm>
+            <a:off x="822960" y="4550664"/>
+            <a:ext cx="365760" cy="365760"/>
+          </a:xfrm>
+          <a:prstGeom prst="rect">
+            <a:avLst/>
+          </a:prstGeom>
+          <a:noFill/>
+          <a:ln/>
+        </p:spPr>
+        <p:txBody>
+          <a:bodyPr wrap="square" lIns="0" tIns="0" rIns="0" bIns="0" rtlCol="0" anchor="ctr"/>
+          <a:lstStyle/>
+          <a:p>
+            <a:pPr algn="ctr" indent="0" marL="0">
+              <a:buNone/>
+            </a:pPr>
+            <a:r>
+              <a:rPr lang="en-US" sz="1300" b="1" dirty="0">
+                <a:solidFill>
+                  <a:srgbClr val="F2F0EA"/>
+                </a:solidFill>
+                <a:latin typeface="Arial" pitchFamily="34" charset="0"/>
+                <a:ea typeface="Arial" pitchFamily="34" charset="-122"/>
+                <a:cs typeface="Arial" pitchFamily="34" charset="-120"/>
+              </a:rPr>
+              <a:t>3</a:t>
+            </a:r>
+            <a:endParaRPr lang="en-US" sz="1300" dirty="0"/>
+          </a:p>
+        </p:txBody>
+      </p:sp>
+      <p:sp>
+        <p:nvSpPr>
+          <p:cNvPr id="19" name="Text 16"/>
+          <p:cNvSpPr/>
+          <p:nvPr/>
+        </p:nvSpPr>
+        <p:spPr>
+          <a:xfrm>
+            <a:off x="1417320" y="4559808"/>
+            <a:ext cx="9174175" cy="1564640"/>
+          </a:xfrm>
+          <a:prstGeom prst="rect">
+            <a:avLst/>
+          </a:prstGeom>
+          <a:noFill/>
+          <a:ln/>
+        </p:spPr>
+        <p:txBody>
+          <a:bodyPr wrap="square" lIns="0" tIns="0" rIns="0" bIns="0" rtlCol="0" anchor="t">
+            <a:normAutofit/>
+          </a:bodyPr>
+          <a:lstStyle/>
+          <a:p>
+            <a:pPr indent="0" marL="0">
+              <a:lnSpc>
+                <a:spcPct val="105000"/>
+              </a:lnSpc>
+              <a:buNone/>
+            </a:pPr>
+            <a:r>
+              <a:rPr lang="en-US" sz="2200" dirty="0">
+                <a:solidFill>
+                  <a:srgbClr val="F2F0EA"/>
+                </a:solidFill>
+                <a:latin typeface="Arial" pitchFamily="34" charset="0"/>
+                <a:ea typeface="Arial" pitchFamily="34" charset="-122"/>
+                <a:cs typeface="Arial" pitchFamily="34" charset="-120"/>
+              </a:rPr>
+              <a:t>Ficas a caracterizar as personagens com a página de cada prova, a ler o voo da passarola e o reencontro do último capítulo, e a comparar a passarola e o convento como projetos.</a:t>
+            </a:r>
+            <a:endParaRPr lang="en-US" sz="2200" dirty="0"/>
+          </a:p>
+        </p:txBody>
+      </p:sp>
+    </p:spTree>
+  </p:cSld>
+  <p:clrMapOvr>
+    <a:masterClrMapping/>
+  </p:clrMapOvr>
+</p:sld>
+</file>
+
+<file path=ppt/slides/slide6.xml><?xml version="1.0" encoding="utf-8"?>
+<p:sld xmlns:a="http://schemas.openxmlformats.org/drawingml/2006/main" xmlns:r="http://schemas.openxmlformats.org/officeDocument/2006/relationships" xmlns:p="http://schemas.openxmlformats.org/presentationml/2006/main">
+  <p:cSld name="Slide 6">
+    <p:bg>
+      <p:bgPr>
+        <a:solidFill>
+          <a:srgbClr val="111111"/>
+        </a:solidFill>
+      </p:bgPr>
+    </p:bg>
+    <p:spTree>
+      <p:nvGrpSpPr>
+        <p:cNvPr id="1" name=""/>
+        <p:cNvGrpSpPr/>
+        <p:nvPr/>
+      </p:nvGrpSpPr>
+      <p:grpSpPr>
+        <a:xfrm>
+          <a:off x="0" y="0"/>
+          <a:ext cx="0" cy="0"/>
+          <a:chOff x="0" y="0"/>
+          <a:chExt cx="0" cy="0"/>
+        </a:xfrm>
+      </p:grpSpPr>
+      <p:sp>
+        <p:nvSpPr>
+          <p:cNvPr id="3" name="Text 0"/>
+          <p:cNvSpPr/>
+          <p:nvPr/>
+        </p:nvSpPr>
+        <p:spPr>
+          <a:xfrm>
+            <a:off x="10637215" y="384048"/>
+            <a:ext cx="731520" cy="365760"/>
+          </a:xfrm>
+          <a:prstGeom prst="rect">
+            <a:avLst/>
+          </a:prstGeom>
+          <a:noFill/>
+          <a:ln/>
+        </p:spPr>
+        <p:txBody>
+          <a:bodyPr wrap="square" lIns="0" tIns="0" rIns="0" bIns="0" rtlCol="0" anchor="ctr"/>
+          <a:lstStyle/>
+          <a:p>
+            <a:pPr algn="r" indent="0" marL="0">
+              <a:buNone/>
+            </a:pPr>
+            <a:r>
+              <a:rPr lang="en-US" sz="1200" b="1" spc="300" kern="0" dirty="0">
+                <a:solidFill>
+                  <a:srgbClr val="A9A79F"/>
+                </a:solidFill>
+                <a:latin typeface="Arial" pitchFamily="34" charset="0"/>
+                <a:ea typeface="Arial" pitchFamily="34" charset="-122"/>
+                <a:cs typeface="Arial" pitchFamily="34" charset="-120"/>
+              </a:rPr>
+              <a:t>EPI</a:t>
+            </a:r>
+            <a:endParaRPr lang="en-US" sz="1200" dirty="0"/>
+          </a:p>
+        </p:txBody>
+      </p:sp>
+      <p:sp>
+        <p:nvSpPr>
+          <p:cNvPr id="4" name="Text 1"/>
+          <p:cNvSpPr/>
+          <p:nvPr/>
+        </p:nvSpPr>
+        <p:spPr>
+          <a:xfrm>
+            <a:off x="822960" y="6400800"/>
+            <a:ext cx="9631375" cy="274320"/>
+          </a:xfrm>
+          <a:prstGeom prst="rect">
+            <a:avLst/>
+          </a:prstGeom>
+          <a:noFill/>
+          <a:ln/>
+        </p:spPr>
+        <p:txBody>
+          <a:bodyPr wrap="square" lIns="0" tIns="0" rIns="0" bIns="0" rtlCol="0" anchor="ctr"/>
+          <a:lstStyle/>
+          <a:p>
+            <a:pPr indent="0" marL="0">
+              <a:buNone/>
+            </a:pPr>
+            <a:r>
+              <a:rPr lang="en-US" sz="1000" dirty="0">
+                <a:solidFill>
+                  <a:srgbClr val="A9A79F"/>
+                </a:solidFill>
+                <a:latin typeface="Arial" pitchFamily="34" charset="0"/>
+                <a:ea typeface="Arial" pitchFamily="34" charset="-122"/>
+                <a:cs typeface="Arial" pitchFamily="34" charset="-120"/>
+              </a:rPr>
+              <a:t>Lição M9-F02, Ver e não ver</a:t>
+            </a:r>
+            <a:endParaRPr lang="en-US" sz="1000" dirty="0"/>
+          </a:p>
+        </p:txBody>
+      </p:sp>
+      <p:sp>
+        <p:nvSpPr>
+          <p:cNvPr id="5" name="Text 2"/>
+          <p:cNvSpPr/>
+          <p:nvPr/>
+        </p:nvSpPr>
+        <p:spPr>
+          <a:xfrm>
+            <a:off x="10637215" y="6400800"/>
+            <a:ext cx="731520" cy="274320"/>
+          </a:xfrm>
+          <a:prstGeom prst="rect">
+            <a:avLst/>
+          </a:prstGeom>
+          <a:noFill/>
+          <a:ln/>
+        </p:spPr>
+        <p:txBody>
+          <a:bodyPr wrap="square" lIns="0" tIns="0" rIns="0" bIns="0" rtlCol="0" anchor="ctr"/>
+          <a:lstStyle/>
+          <a:p>
+            <a:pPr algn="r" indent="0" marL="0">
+              <a:buNone/>
+            </a:pPr>
+            <a:r>
+              <a:rPr lang="en-US" sz="1000" dirty="0">
+                <a:solidFill>
+                  <a:srgbClr val="A9A79F"/>
+                </a:solidFill>
+                <a:latin typeface="Arial" pitchFamily="34" charset="0"/>
+                <a:ea typeface="Arial" pitchFamily="34" charset="-122"/>
+                <a:cs typeface="Arial" pitchFamily="34" charset="-120"/>
+              </a:rPr>
+              <a:t>6</a:t>
+            </a:r>
+            <a:endParaRPr lang="en-US" sz="1000" dirty="0"/>
+          </a:p>
+        </p:txBody>
+      </p:sp>
+      <p:sp>
+        <p:nvSpPr>
+          <p:cNvPr id="6" name="Shape 3"/>
+          <p:cNvSpPr/>
+          <p:nvPr/>
+        </p:nvSpPr>
+        <p:spPr>
+          <a:xfrm>
+            <a:off x="822960" y="502920"/>
+            <a:ext cx="201168" cy="201168"/>
+          </a:xfrm>
+          <a:prstGeom prst="rect">
+            <a:avLst/>
+          </a:prstGeom>
+          <a:ln w="19050">
+            <a:solidFill>
+              <a:srgbClr val="F2F0EA"/>
+            </a:solidFill>
+            <a:prstDash val="solid"/>
+          </a:ln>
+        </p:spPr>
+      </p:sp>
+      <p:sp>
+        <p:nvSpPr>
+          <p:cNvPr id="7" name="Text 4"/>
+          <p:cNvSpPr/>
+          <p:nvPr/>
+        </p:nvSpPr>
+        <p:spPr>
+          <a:xfrm>
+            <a:off x="1188720" y="457200"/>
+            <a:ext cx="9448495" cy="292608"/>
+          </a:xfrm>
+          <a:prstGeom prst="rect">
+            <a:avLst/>
+          </a:prstGeom>
+          <a:noFill/>
+          <a:ln/>
+        </p:spPr>
+        <p:txBody>
+          <a:bodyPr wrap="square" lIns="0" tIns="0" rIns="0" bIns="0" rtlCol="0" anchor="ctr"/>
+          <a:lstStyle/>
+          <a:p>
+            <a:pPr indent="0" marL="0">
+              <a:buNone/>
+            </a:pPr>
+            <a:r>
+              <a:rPr lang="en-US" sz="1100" b="1" spc="250" kern="0" dirty="0">
+                <a:solidFill>
+                  <a:srgbClr val="A9A79F"/>
+                </a:solidFill>
+                <a:latin typeface="Arial" pitchFamily="34" charset="0"/>
+                <a:ea typeface="Arial" pitchFamily="34" charset="-122"/>
+                <a:cs typeface="Arial" pitchFamily="34" charset="-120"/>
+              </a:rPr>
+              <a:t>VER, E COMPLETAR NO CADERNO</a:t>
+            </a:r>
+            <a:endParaRPr lang="en-US" sz="1100" dirty="0"/>
+          </a:p>
+        </p:txBody>
+      </p:sp>
+      <p:sp>
+        <p:nvSpPr>
+          <p:cNvPr id="8" name="Text 5"/>
+          <p:cNvSpPr/>
+          <p:nvPr/>
+        </p:nvSpPr>
+        <p:spPr>
+          <a:xfrm>
+            <a:off x="822960" y="868680"/>
+            <a:ext cx="9814255" cy="822960"/>
+          </a:xfrm>
+          <a:prstGeom prst="rect">
+            <a:avLst/>
+          </a:prstGeom>
+          <a:noFill/>
+          <a:ln/>
+        </p:spPr>
+        <p:txBody>
+          <a:bodyPr wrap="square" lIns="0" tIns="0" rIns="0" bIns="0" rtlCol="0" anchor="b">
+            <a:normAutofit/>
+          </a:bodyPr>
+          <a:lstStyle/>
+          <a:p>
+            <a:pPr indent="0" marL="0">
+              <a:buNone/>
+            </a:pPr>
+            <a:r>
+              <a:rPr lang="en-US" sz="3400" dirty="0">
+                <a:solidFill>
+                  <a:srgbClr val="F2F0EA"/>
+                </a:solidFill>
+                <a:latin typeface="Arial" pitchFamily="34" charset="0"/>
+                <a:ea typeface="Arial" pitchFamily="34" charset="-122"/>
+                <a:cs typeface="Arial" pitchFamily="34" charset="-120"/>
+              </a:rPr>
+              <a:t>Completa no caderno</a:t>
+            </a:r>
+            <a:endParaRPr lang="en-US" sz="3400" dirty="0"/>
+          </a:p>
+        </p:txBody>
+      </p:sp>
+      <p:sp>
+        <p:nvSpPr>
+          <p:cNvPr id="9" name="Shape 6"/>
+          <p:cNvSpPr/>
+          <p:nvPr/>
+        </p:nvSpPr>
+        <p:spPr>
+          <a:xfrm>
+            <a:off x="822960" y="1746504"/>
+            <a:ext cx="640080" cy="64008"/>
+          </a:xfrm>
+          <a:prstGeom prst="rect">
+            <a:avLst/>
+          </a:prstGeom>
+          <a:solidFill>
+            <a:srgbClr val="E4555C"/>
+          </a:solidFill>
+          <a:ln w="12700">
+            <a:solidFill>
+              <a:srgbClr val="E4555C"/>
+            </a:solidFill>
+            <a:prstDash val="solid"/>
+          </a:ln>
+        </p:spPr>
+      </p:sp>
       <p:graphicFrame>
         <p:nvGraphicFramePr>
-          <p:cNvPr id="6" name="Table 0"/>
+          <p:cNvPr id="7" name="Table 0"/>
           <p:cNvGraphicFramePr>
             <a:graphicFrameLocks noGrp="1"/>
           </p:cNvGraphicFramePr>
@@ -5039,375 +5748,6 @@
 </p:sld>
 </file>
 
-<file path=ppt/slides/slide6.xml><?xml version="1.0" encoding="utf-8"?>
-<p:sld xmlns:a="http://schemas.openxmlformats.org/drawingml/2006/main" xmlns:r="http://schemas.openxmlformats.org/officeDocument/2006/relationships" xmlns:p="http://schemas.openxmlformats.org/presentationml/2006/main">
-  <p:cSld name="Slide 6">
-    <p:bg>
-      <p:bgPr>
-        <a:solidFill>
-          <a:srgbClr val="111111"/>
-        </a:solidFill>
-      </p:bgPr>
-    </p:bg>
-    <p:spTree>
-      <p:nvGrpSpPr>
-        <p:cNvPr id="1" name=""/>
-        <p:cNvGrpSpPr/>
-        <p:nvPr/>
-      </p:nvGrpSpPr>
-      <p:grpSpPr>
-        <a:xfrm>
-          <a:off x="0" y="0"/>
-          <a:ext cx="0" cy="0"/>
-          <a:chOff x="0" y="0"/>
-          <a:chExt cx="0" cy="0"/>
-        </a:xfrm>
-      </p:grpSpPr>
-      <p:sp>
-        <p:nvSpPr>
-          <p:cNvPr id="3" name="Text 0"/>
-          <p:cNvSpPr/>
-          <p:nvPr/>
-        </p:nvSpPr>
-        <p:spPr>
-          <a:xfrm>
-            <a:off x="10637215" y="384048"/>
-            <a:ext cx="731520" cy="365760"/>
-          </a:xfrm>
-          <a:prstGeom prst="rect">
-            <a:avLst/>
-          </a:prstGeom>
-          <a:noFill/>
-          <a:ln/>
-        </p:spPr>
-        <p:txBody>
-          <a:bodyPr wrap="square" lIns="0" tIns="0" rIns="0" bIns="0" rtlCol="0" anchor="ctr"/>
-          <a:lstStyle/>
-          <a:p>
-            <a:pPr algn="r" indent="0" marL="0">
-              <a:buNone/>
-            </a:pPr>
-            <a:r>
-              <a:rPr lang="en-US" sz="1200" b="1" spc="300" kern="0" dirty="0">
-                <a:solidFill>
-                  <a:srgbClr val="A9A79F"/>
-                </a:solidFill>
-                <a:latin typeface="Arial" pitchFamily="34" charset="0"/>
-                <a:ea typeface="Arial" pitchFamily="34" charset="-122"/>
-                <a:cs typeface="Arial" pitchFamily="34" charset="-120"/>
-              </a:rPr>
-              <a:t>EPI</a:t>
-            </a:r>
-            <a:endParaRPr lang="en-US" sz="1200" dirty="0"/>
-          </a:p>
-        </p:txBody>
-      </p:sp>
-      <p:sp>
-        <p:nvSpPr>
-          <p:cNvPr id="4" name="Text 1"/>
-          <p:cNvSpPr/>
-          <p:nvPr/>
-        </p:nvSpPr>
-        <p:spPr>
-          <a:xfrm>
-            <a:off x="822960" y="6400800"/>
-            <a:ext cx="9631375" cy="274320"/>
-          </a:xfrm>
-          <a:prstGeom prst="rect">
-            <a:avLst/>
-          </a:prstGeom>
-          <a:noFill/>
-          <a:ln/>
-        </p:spPr>
-        <p:txBody>
-          <a:bodyPr wrap="square" lIns="0" tIns="0" rIns="0" bIns="0" rtlCol="0" anchor="ctr"/>
-          <a:lstStyle/>
-          <a:p>
-            <a:pPr indent="0" marL="0">
-              <a:buNone/>
-            </a:pPr>
-            <a:r>
-              <a:rPr lang="en-US" sz="1000" dirty="0">
-                <a:solidFill>
-                  <a:srgbClr val="A9A79F"/>
-                </a:solidFill>
-                <a:latin typeface="Arial" pitchFamily="34" charset="0"/>
-                <a:ea typeface="Arial" pitchFamily="34" charset="-122"/>
-                <a:cs typeface="Arial" pitchFamily="34" charset="-120"/>
-              </a:rPr>
-              <a:t>Lição M9-F02, Ver e não ver</a:t>
-            </a:r>
-            <a:endParaRPr lang="en-US" sz="1000" dirty="0"/>
-          </a:p>
-        </p:txBody>
-      </p:sp>
-      <p:sp>
-        <p:nvSpPr>
-          <p:cNvPr id="5" name="Text 2"/>
-          <p:cNvSpPr/>
-          <p:nvPr/>
-        </p:nvSpPr>
-        <p:spPr>
-          <a:xfrm>
-            <a:off x="10637215" y="6400800"/>
-            <a:ext cx="731520" cy="274320"/>
-          </a:xfrm>
-          <a:prstGeom prst="rect">
-            <a:avLst/>
-          </a:prstGeom>
-          <a:noFill/>
-          <a:ln/>
-        </p:spPr>
-        <p:txBody>
-          <a:bodyPr wrap="square" lIns="0" tIns="0" rIns="0" bIns="0" rtlCol="0" anchor="ctr"/>
-          <a:lstStyle/>
-          <a:p>
-            <a:pPr algn="r" indent="0" marL="0">
-              <a:buNone/>
-            </a:pPr>
-            <a:r>
-              <a:rPr lang="en-US" sz="1000" dirty="0">
-                <a:solidFill>
-                  <a:srgbClr val="A9A79F"/>
-                </a:solidFill>
-                <a:latin typeface="Arial" pitchFamily="34" charset="0"/>
-                <a:ea typeface="Arial" pitchFamily="34" charset="-122"/>
-                <a:cs typeface="Arial" pitchFamily="34" charset="-120"/>
-              </a:rPr>
-              <a:t>6</a:t>
-            </a:r>
-            <a:endParaRPr lang="en-US" sz="1000" dirty="0"/>
-          </a:p>
-        </p:txBody>
-      </p:sp>
-      <p:sp>
-        <p:nvSpPr>
-          <p:cNvPr id="6" name="Shape 3"/>
-          <p:cNvSpPr/>
-          <p:nvPr/>
-        </p:nvSpPr>
-        <p:spPr>
-          <a:xfrm>
-            <a:off x="822960" y="502920"/>
-            <a:ext cx="201168" cy="201168"/>
-          </a:xfrm>
-          <a:prstGeom prst="ellipse">
-            <a:avLst/>
-          </a:prstGeom>
-          <a:ln w="19050">
-            <a:solidFill>
-              <a:srgbClr val="F2F0EA"/>
-            </a:solidFill>
-            <a:prstDash val="solid"/>
-          </a:ln>
-        </p:spPr>
-      </p:sp>
-      <p:sp>
-        <p:nvSpPr>
-          <p:cNvPr id="7" name="Text 4"/>
-          <p:cNvSpPr/>
-          <p:nvPr/>
-        </p:nvSpPr>
-        <p:spPr>
-          <a:xfrm>
-            <a:off x="1188720" y="457200"/>
-            <a:ext cx="9448495" cy="292608"/>
-          </a:xfrm>
-          <a:prstGeom prst="rect">
-            <a:avLst/>
-          </a:prstGeom>
-          <a:noFill/>
-          <a:ln/>
-        </p:spPr>
-        <p:txBody>
-          <a:bodyPr wrap="square" lIns="0" tIns="0" rIns="0" bIns="0" rtlCol="0" anchor="ctr"/>
-          <a:lstStyle/>
-          <a:p>
-            <a:pPr indent="0" marL="0">
-              <a:buNone/>
-            </a:pPr>
-            <a:r>
-              <a:rPr lang="en-US" sz="1100" b="1" spc="250" kern="0" dirty="0">
-                <a:solidFill>
-                  <a:srgbClr val="A9A79F"/>
-                </a:solidFill>
-                <a:latin typeface="Arial" pitchFamily="34" charset="0"/>
-                <a:ea typeface="Arial" pitchFamily="34" charset="-122"/>
-                <a:cs typeface="Arial" pitchFamily="34" charset="-120"/>
-              </a:rPr>
-              <a:t>VER</a:t>
-            </a:r>
-            <a:endParaRPr lang="en-US" sz="1100" dirty="0"/>
-          </a:p>
-        </p:txBody>
-      </p:sp>
-      <p:sp>
-        <p:nvSpPr>
-          <p:cNvPr id="8" name="Text 5"/>
-          <p:cNvSpPr/>
-          <p:nvPr/>
-        </p:nvSpPr>
-        <p:spPr>
-          <a:xfrm>
-            <a:off x="822960" y="868680"/>
-            <a:ext cx="9814255" cy="1097280"/>
-          </a:xfrm>
-          <a:prstGeom prst="rect">
-            <a:avLst/>
-          </a:prstGeom>
-          <a:noFill/>
-          <a:ln/>
-        </p:spPr>
-        <p:txBody>
-          <a:bodyPr wrap="square" lIns="0" tIns="0" rIns="0" bIns="0" rtlCol="0" anchor="b">
-            <a:normAutofit/>
-          </a:bodyPr>
-          <a:lstStyle/>
-          <a:p>
-            <a:pPr indent="0" marL="0">
-              <a:buNone/>
-            </a:pPr>
-            <a:r>
-              <a:rPr lang="en-US" sz="3000" dirty="0">
-                <a:solidFill>
-                  <a:srgbClr val="F2F0EA"/>
-                </a:solidFill>
-                <a:latin typeface="Arial" pitchFamily="34" charset="0"/>
-                <a:ea typeface="Arial" pitchFamily="34" charset="-122"/>
-                <a:cs typeface="Arial" pitchFamily="34" charset="-120"/>
-              </a:rPr>
-              <a:t>Com o livro aberto: o voo e o reencontro</a:t>
-            </a:r>
-            <a:endParaRPr lang="en-US" sz="3000" dirty="0"/>
-          </a:p>
-        </p:txBody>
-      </p:sp>
-      <p:sp>
-        <p:nvSpPr>
-          <p:cNvPr id="9" name="Shape 6"/>
-          <p:cNvSpPr/>
-          <p:nvPr/>
-        </p:nvSpPr>
-        <p:spPr>
-          <a:xfrm>
-            <a:off x="822960" y="2020824"/>
-            <a:ext cx="640080" cy="64008"/>
-          </a:xfrm>
-          <a:prstGeom prst="rect">
-            <a:avLst/>
-          </a:prstGeom>
-          <a:solidFill>
-            <a:srgbClr val="E4555C"/>
-          </a:solidFill>
-          <a:ln w="12700">
-            <a:solidFill>
-              <a:srgbClr val="E4555C"/>
-            </a:solidFill>
-            <a:prstDash val="solid"/>
-          </a:ln>
-        </p:spPr>
-      </p:sp>
-      <p:sp>
-        <p:nvSpPr>
-          <p:cNvPr id="10" name="Text 7"/>
-          <p:cNvSpPr/>
-          <p:nvPr/>
-        </p:nvSpPr>
-        <p:spPr>
-          <a:xfrm>
-            <a:off x="822960" y="2286000"/>
-            <a:ext cx="9814255" cy="3749040"/>
-          </a:xfrm>
-          <a:prstGeom prst="rect">
-            <a:avLst/>
-          </a:prstGeom>
-          <a:noFill/>
-          <a:ln/>
-        </p:spPr>
-        <p:txBody>
-          <a:bodyPr wrap="square" lIns="0" tIns="0" rIns="0" bIns="0" rtlCol="0" anchor="t">
-            <a:normAutofit/>
-          </a:bodyPr>
-          <a:lstStyle/>
-          <a:p>
-            <a:pPr indent="0" marL="0">
-              <a:lnSpc>
-                <a:spcPct val="120000"/>
-              </a:lnSpc>
-              <a:spcAft>
-                <a:spcPts val="1000"/>
-              </a:spcAft>
-              <a:buNone/>
-            </a:pPr>
-            <a:r>
-              <a:rPr lang="en-US" sz="2300" dirty="0">
-                <a:solidFill>
-                  <a:srgbClr val="F2F0EA"/>
-                </a:solidFill>
-                <a:latin typeface="Georgia" pitchFamily="34" charset="0"/>
-                <a:ea typeface="Georgia" pitchFamily="34" charset="-122"/>
-                <a:cs typeface="Georgia" pitchFamily="34" charset="-120"/>
-              </a:rPr>
-              <a:t>Duas passagens para leres no livro antes das perguntas. O voo da passarola (nas edições da Caminho, pp. 196 e 197): a máquina sobe, o padre Bartolomeu Lourenço vê Lisboa e o mar lá de cima e diz a quem deve o voo.</a:t>
-            </a:r>
-            <a:endParaRPr lang="en-US" sz="2300" dirty="0"/>
-          </a:p>
-          <a:p>
-            <a:pPr indent="0" marL="0">
-              <a:lnSpc>
-                <a:spcPct val="120000"/>
-              </a:lnSpc>
-              <a:spcAft>
-                <a:spcPts val="1000"/>
-              </a:spcAft>
-              <a:buNone/>
-            </a:pPr>
-            <a:r>
-              <a:rPr lang="en-US" sz="2300" dirty="0">
-                <a:solidFill>
-                  <a:srgbClr val="F2F0EA"/>
-                </a:solidFill>
-                <a:latin typeface="Georgia" pitchFamily="34" charset="0"/>
-                <a:ea typeface="Georgia" pitchFamily="34" charset="-122"/>
-                <a:cs typeface="Georgia" pitchFamily="34" charset="-120"/>
-              </a:rPr>
-              <a:t>O reencontro (capítulo XXV, o último): Blimunda procura Baltasar durante nove anos e encontra-o em Lisboa, num auto de fé; chega em jejum.</a:t>
-            </a:r>
-            <a:endParaRPr lang="en-US" sz="2300" dirty="0"/>
-          </a:p>
-          <a:p>
-            <a:pPr indent="0" marL="0">
-              <a:lnSpc>
-                <a:spcPct val="120000"/>
-              </a:lnSpc>
-              <a:spcAft>
-                <a:spcPts val="1000"/>
-              </a:spcAft>
-              <a:buNone/>
-            </a:pPr>
-            <a:r>
-              <a:rPr lang="en-US" sz="2300" dirty="0">
-                <a:solidFill>
-                  <a:srgbClr val="F2F0EA"/>
-                </a:solidFill>
-                <a:latin typeface="Georgia" pitchFamily="34" charset="0"/>
-                <a:ea typeface="Georgia" pitchFamily="34" charset="-122"/>
-                <a:cs typeface="Georgia" pitchFamily="34" charset="-120"/>
-              </a:rPr>
-              <a:t>O romance tem direitos de autor: lê-se no livro ou na folha que o docente entrega.</a:t>
-            </a:r>
-            <a:endParaRPr lang="en-US" sz="2300" dirty="0"/>
-          </a:p>
-        </p:txBody>
-      </p:sp>
-    </p:spTree>
-  </p:cSld>
-  <p:clrMapOvr>
-    <a:masterClrMapping/>
-  </p:clrMapOvr>
-</p:sld>
-</file>
-
 <file path=ppt/slides/slide7.xml><?xml version="1.0" encoding="utf-8"?>
 <p:sld xmlns:a="http://schemas.openxmlformats.org/drawingml/2006/main" xmlns:r="http://schemas.openxmlformats.org/officeDocument/2006/relationships" xmlns:p="http://schemas.openxmlformats.org/presentationml/2006/main">
   <p:cSld name="Slide 7">
@@ -5560,7 +5900,7 @@
             <a:off x="822960" y="502920"/>
             <a:ext cx="201168" cy="201168"/>
           </a:xfrm>
-          <a:prstGeom prst="rect">
+          <a:prstGeom prst="ellipse">
             <a:avLst/>
           </a:prstGeom>
           <a:ln w="19050">
@@ -5604,7 +5944,7 @@
                 <a:ea typeface="Arial" pitchFamily="34" charset="-122"/>
                 <a:cs typeface="Arial" pitchFamily="34" charset="-120"/>
               </a:rPr>
-              <a:t>AGORA NO TELEMÓVEL, QUINZE MINUTOS</a:t>
+              <a:t>VER</a:t>
             </a:r>
             <a:endParaRPr lang="en-US" sz="1100" dirty="0"/>
           </a:p>
@@ -5619,7 +5959,7 @@
         <p:spPr>
           <a:xfrm>
             <a:off x="822960" y="868680"/>
-            <a:ext cx="7071055" cy="1188720"/>
+            <a:ext cx="9814255" cy="1097280"/>
           </a:xfrm>
           <a:prstGeom prst="rect">
             <a:avLst/>
@@ -5637,7 +5977,7 @@
               <a:buNone/>
             </a:pPr>
             <a:r>
-              <a:rPr lang="en-US" sz="3800" dirty="0">
+              <a:rPr lang="en-US" sz="3000" dirty="0">
                 <a:solidFill>
                   <a:srgbClr val="F2F0EA"/>
                 </a:solidFill>
@@ -5645,9 +5985,9 @@
                 <a:ea typeface="Arial" pitchFamily="34" charset="-122"/>
                 <a:cs typeface="Arial" pitchFamily="34" charset="-120"/>
               </a:rPr>
-              <a:t>Abre a lição no telemóvel</a:t>
-            </a:r>
-            <a:endParaRPr lang="en-US" sz="3800" dirty="0"/>
+              <a:t>Com o livro aberto: o voo e o reencontro</a:t>
+            </a:r>
+            <a:endParaRPr lang="en-US" sz="3000" dirty="0"/>
           </a:p>
         </p:txBody>
       </p:sp>
@@ -5659,7 +5999,7 @@
         </p:nvSpPr>
         <p:spPr>
           <a:xfrm>
-            <a:off x="822960" y="2121408"/>
+            <a:off x="822960" y="2020824"/>
             <a:ext cx="640080" cy="64008"/>
           </a:xfrm>
           <a:prstGeom prst="rect">
@@ -5678,101 +6018,14 @@
       </p:sp>
       <p:sp>
         <p:nvSpPr>
-          <p:cNvPr id="10" name="Shape 7"/>
-          <p:cNvSpPr/>
-          <p:nvPr/>
-        </p:nvSpPr>
-        <p:spPr>
-          <a:xfrm>
-            <a:off x="1005840" y="2606040"/>
-            <a:ext cx="0" cy="1765808"/>
-          </a:xfrm>
-          <a:prstGeom prst="line">
-            <a:avLst/>
-          </a:prstGeom>
-          <a:noFill/>
-          <a:ln w="12700">
-            <a:solidFill>
-              <a:srgbClr val="A9A79F"/>
-            </a:solidFill>
-            <a:prstDash val="solid"/>
-          </a:ln>
-        </p:spPr>
-      </p:sp>
-      <p:sp>
-        <p:nvSpPr>
-          <p:cNvPr id="11" name="Shape 8"/>
-          <p:cNvSpPr/>
-          <p:nvPr/>
-        </p:nvSpPr>
-        <p:spPr>
-          <a:xfrm>
-            <a:off x="822960" y="2423160"/>
-            <a:ext cx="365760" cy="365760"/>
-          </a:xfrm>
-          <a:prstGeom prst="ellipse">
-            <a:avLst/>
-          </a:prstGeom>
-          <a:solidFill>
-            <a:srgbClr val="111111"/>
-          </a:solidFill>
-          <a:ln w="15875">
-            <a:solidFill>
-              <a:srgbClr val="F2F0EA"/>
-            </a:solidFill>
-            <a:prstDash val="solid"/>
-          </a:ln>
-        </p:spPr>
-      </p:sp>
-      <p:sp>
-        <p:nvSpPr>
-          <p:cNvPr id="12" name="Text 9"/>
-          <p:cNvSpPr/>
-          <p:nvPr/>
-        </p:nvSpPr>
-        <p:spPr>
-          <a:xfrm>
-            <a:off x="822960" y="2423160"/>
-            <a:ext cx="365760" cy="365760"/>
-          </a:xfrm>
-          <a:prstGeom prst="rect">
-            <a:avLst/>
-          </a:prstGeom>
-          <a:noFill/>
-          <a:ln/>
-        </p:spPr>
-        <p:txBody>
-          <a:bodyPr wrap="square" lIns="0" tIns="0" rIns="0" bIns="0" rtlCol="0" anchor="ctr"/>
-          <a:lstStyle/>
-          <a:p>
-            <a:pPr algn="ctr" indent="0" marL="0">
-              <a:buNone/>
-            </a:pPr>
-            <a:r>
-              <a:rPr lang="en-US" sz="1300" b="1" dirty="0">
-                <a:solidFill>
-                  <a:srgbClr val="F2F0EA"/>
-                </a:solidFill>
-                <a:latin typeface="Arial" pitchFamily="34" charset="0"/>
-                <a:ea typeface="Arial" pitchFamily="34" charset="-122"/>
-                <a:cs typeface="Arial" pitchFamily="34" charset="-120"/>
-              </a:rPr>
-              <a:t>1</a:t>
-            </a:r>
-            <a:endParaRPr lang="en-US" sz="1300" dirty="0"/>
-          </a:p>
-        </p:txBody>
-      </p:sp>
-      <p:sp>
-        <p:nvSpPr>
-          <p:cNvPr id="13" name="Text 10"/>
-          <p:cNvSpPr/>
-          <p:nvPr/>
-        </p:nvSpPr>
-        <p:spPr>
-          <a:xfrm>
-            <a:off x="1417320" y="2432304"/>
-            <a:ext cx="6430975" cy="882904"/>
+          <p:cNvPr id="10" name="Text 7"/>
+          <p:cNvSpPr/>
+          <p:nvPr/>
+        </p:nvSpPr>
+        <p:spPr>
+          <a:xfrm>
+            <a:off x="822960" y="2286000"/>
+            <a:ext cx="9814255" cy="3749040"/>
           </a:xfrm>
           <a:prstGeom prst="rect">
             <a:avLst/>
@@ -5788,328 +6041,71 @@
           <a:p>
             <a:pPr indent="0" marL="0">
               <a:lnSpc>
-                <a:spcPct val="105000"/>
+                <a:spcPct val="120000"/>
               </a:lnSpc>
-              <a:buNone/>
-            </a:pPr>
-            <a:r>
-              <a:rPr lang="en-US" sz="2200" dirty="0">
+              <a:spcAft>
+                <a:spcPts val="1000"/>
+              </a:spcAft>
+              <a:buNone/>
+            </a:pPr>
+            <a:r>
+              <a:rPr lang="en-US" sz="2300" dirty="0">
                 <a:solidFill>
                   <a:srgbClr val="F2F0EA"/>
                 </a:solidFill>
-                <a:latin typeface="Arial" pitchFamily="34" charset="0"/>
-                <a:ea typeface="Arial" pitchFamily="34" charset="-122"/>
-                <a:cs typeface="Arial" pitchFamily="34" charset="-120"/>
-              </a:rPr>
-              <a:t>Lê e responde aos cartões, um de cada vez</a:t>
-            </a:r>
-            <a:endParaRPr lang="en-US" sz="2200" dirty="0"/>
-          </a:p>
-        </p:txBody>
-      </p:sp>
-      <p:sp>
-        <p:nvSpPr>
-          <p:cNvPr id="14" name="Shape 11"/>
-          <p:cNvSpPr/>
-          <p:nvPr/>
-        </p:nvSpPr>
-        <p:spPr>
-          <a:xfrm>
-            <a:off x="822960" y="3306064"/>
-            <a:ext cx="365760" cy="365760"/>
-          </a:xfrm>
-          <a:prstGeom prst="ellipse">
-            <a:avLst/>
-          </a:prstGeom>
-          <a:solidFill>
-            <a:srgbClr val="111111"/>
-          </a:solidFill>
-          <a:ln w="15875">
-            <a:solidFill>
-              <a:srgbClr val="F2F0EA"/>
-            </a:solidFill>
-            <a:prstDash val="solid"/>
-          </a:ln>
-        </p:spPr>
-      </p:sp>
-      <p:sp>
-        <p:nvSpPr>
-          <p:cNvPr id="15" name="Text 12"/>
-          <p:cNvSpPr/>
-          <p:nvPr/>
-        </p:nvSpPr>
-        <p:spPr>
-          <a:xfrm>
-            <a:off x="822960" y="3306064"/>
-            <a:ext cx="365760" cy="365760"/>
-          </a:xfrm>
-          <a:prstGeom prst="rect">
-            <a:avLst/>
-          </a:prstGeom>
-          <a:noFill/>
-          <a:ln/>
-        </p:spPr>
-        <p:txBody>
-          <a:bodyPr wrap="square" lIns="0" tIns="0" rIns="0" bIns="0" rtlCol="0" anchor="ctr"/>
-          <a:lstStyle/>
-          <a:p>
-            <a:pPr algn="ctr" indent="0" marL="0">
-              <a:buNone/>
-            </a:pPr>
-            <a:r>
-              <a:rPr lang="en-US" sz="1300" b="1" dirty="0">
-                <a:solidFill>
-                  <a:srgbClr val="F2F0EA"/>
-                </a:solidFill>
-                <a:latin typeface="Arial" pitchFamily="34" charset="0"/>
-                <a:ea typeface="Arial" pitchFamily="34" charset="-122"/>
-                <a:cs typeface="Arial" pitchFamily="34" charset="-120"/>
-              </a:rPr>
-              <a:t>2</a:t>
-            </a:r>
-            <a:endParaRPr lang="en-US" sz="1300" dirty="0"/>
-          </a:p>
-        </p:txBody>
-      </p:sp>
-      <p:sp>
-        <p:nvSpPr>
-          <p:cNvPr id="16" name="Text 13"/>
-          <p:cNvSpPr/>
-          <p:nvPr/>
-        </p:nvSpPr>
-        <p:spPr>
-          <a:xfrm>
-            <a:off x="1417320" y="3315208"/>
-            <a:ext cx="6430975" cy="882904"/>
-          </a:xfrm>
-          <a:prstGeom prst="rect">
-            <a:avLst/>
-          </a:prstGeom>
-          <a:noFill/>
-          <a:ln/>
-        </p:spPr>
-        <p:txBody>
-          <a:bodyPr wrap="square" lIns="0" tIns="0" rIns="0" bIns="0" rtlCol="0" anchor="t">
-            <a:normAutofit/>
-          </a:bodyPr>
-          <a:lstStyle/>
+                <a:latin typeface="Georgia" pitchFamily="34" charset="0"/>
+                <a:ea typeface="Georgia" pitchFamily="34" charset="-122"/>
+                <a:cs typeface="Georgia" pitchFamily="34" charset="-120"/>
+              </a:rPr>
+              <a:t>Duas passagens para leres no livro antes das perguntas. O voo da passarola (nas edições da Caminho, pp. 196 e 197): a máquina sobe, o padre Bartolomeu Lourenço vê Lisboa e o mar lá de cima e diz a quem deve o voo.</a:t>
+            </a:r>
+            <a:endParaRPr lang="en-US" sz="2300" dirty="0"/>
+          </a:p>
           <a:p>
             <a:pPr indent="0" marL="0">
               <a:lnSpc>
-                <a:spcPct val="105000"/>
+                <a:spcPct val="120000"/>
               </a:lnSpc>
-              <a:buNone/>
-            </a:pPr>
-            <a:r>
-              <a:rPr lang="en-US" sz="2200" dirty="0">
+              <a:spcAft>
+                <a:spcPts val="1000"/>
+              </a:spcAft>
+              <a:buNone/>
+            </a:pPr>
+            <a:r>
+              <a:rPr lang="en-US" sz="2300" dirty="0">
                 <a:solidFill>
                   <a:srgbClr val="F2F0EA"/>
                 </a:solidFill>
-                <a:latin typeface="Arial" pitchFamily="34" charset="0"/>
-                <a:ea typeface="Arial" pitchFamily="34" charset="-122"/>
-                <a:cs typeface="Arial" pitchFamily="34" charset="-120"/>
-              </a:rPr>
-              <a:t>No fim, o cartão extra: «A Biblioteca em Fogo»</a:t>
-            </a:r>
-            <a:endParaRPr lang="en-US" sz="2200" dirty="0"/>
-          </a:p>
-        </p:txBody>
-      </p:sp>
-      <p:sp>
-        <p:nvSpPr>
-          <p:cNvPr id="17" name="Shape 14"/>
-          <p:cNvSpPr/>
-          <p:nvPr/>
-        </p:nvSpPr>
-        <p:spPr>
-          <a:xfrm>
-            <a:off x="822960" y="4188968"/>
-            <a:ext cx="365760" cy="365760"/>
-          </a:xfrm>
-          <a:prstGeom prst="ellipse">
-            <a:avLst/>
-          </a:prstGeom>
-          <a:solidFill>
-            <a:srgbClr val="111111"/>
-          </a:solidFill>
-          <a:ln w="15875">
-            <a:solidFill>
-              <a:srgbClr val="F2F0EA"/>
-            </a:solidFill>
-            <a:prstDash val="solid"/>
-          </a:ln>
-        </p:spPr>
-      </p:sp>
-      <p:sp>
-        <p:nvSpPr>
-          <p:cNvPr id="18" name="Text 15"/>
-          <p:cNvSpPr/>
-          <p:nvPr/>
-        </p:nvSpPr>
-        <p:spPr>
-          <a:xfrm>
-            <a:off x="822960" y="4188968"/>
-            <a:ext cx="365760" cy="365760"/>
-          </a:xfrm>
-          <a:prstGeom prst="rect">
-            <a:avLst/>
-          </a:prstGeom>
-          <a:noFill/>
-          <a:ln/>
-        </p:spPr>
-        <p:txBody>
-          <a:bodyPr wrap="square" lIns="0" tIns="0" rIns="0" bIns="0" rtlCol="0" anchor="ctr"/>
-          <a:lstStyle/>
-          <a:p>
-            <a:pPr algn="ctr" indent="0" marL="0">
-              <a:buNone/>
-            </a:pPr>
-            <a:r>
-              <a:rPr lang="en-US" sz="1300" b="1" dirty="0">
-                <a:solidFill>
-                  <a:srgbClr val="F2F0EA"/>
-                </a:solidFill>
-                <a:latin typeface="Arial" pitchFamily="34" charset="0"/>
-                <a:ea typeface="Arial" pitchFamily="34" charset="-122"/>
-                <a:cs typeface="Arial" pitchFamily="34" charset="-120"/>
-              </a:rPr>
-              <a:t>3</a:t>
-            </a:r>
-            <a:endParaRPr lang="en-US" sz="1300" dirty="0"/>
-          </a:p>
-        </p:txBody>
-      </p:sp>
-      <p:sp>
-        <p:nvSpPr>
-          <p:cNvPr id="19" name="Text 16"/>
-          <p:cNvSpPr/>
-          <p:nvPr/>
-        </p:nvSpPr>
-        <p:spPr>
-          <a:xfrm>
-            <a:off x="1417320" y="4198112"/>
-            <a:ext cx="6430975" cy="542036"/>
-          </a:xfrm>
-          <a:prstGeom prst="rect">
-            <a:avLst/>
-          </a:prstGeom>
-          <a:noFill/>
-          <a:ln/>
-        </p:spPr>
-        <p:txBody>
-          <a:bodyPr wrap="square" lIns="0" tIns="0" rIns="0" bIns="0" rtlCol="0" anchor="t">
-            <a:normAutofit/>
-          </a:bodyPr>
-          <a:lstStyle/>
+                <a:latin typeface="Georgia" pitchFamily="34" charset="0"/>
+                <a:ea typeface="Georgia" pitchFamily="34" charset="-122"/>
+                <a:cs typeface="Georgia" pitchFamily="34" charset="-120"/>
+              </a:rPr>
+              <a:t>O reencontro (capítulo XXV, o último): Blimunda procura Baltasar durante nove anos e encontra-o em Lisboa, num auto de fé; chega em jejum.</a:t>
+            </a:r>
+            <a:endParaRPr lang="en-US" sz="2300" dirty="0"/>
+          </a:p>
           <a:p>
             <a:pPr indent="0" marL="0">
               <a:lnSpc>
-                <a:spcPct val="105000"/>
+                <a:spcPct val="120000"/>
               </a:lnSpc>
-              <a:buNone/>
-            </a:pPr>
-            <a:r>
-              <a:rPr lang="en-US" sz="2200" dirty="0">
+              <a:spcAft>
+                <a:spcPts val="1000"/>
+              </a:spcAft>
+              <a:buNone/>
+            </a:pPr>
+            <a:r>
+              <a:rPr lang="en-US" sz="2300" dirty="0">
                 <a:solidFill>
                   <a:srgbClr val="F2F0EA"/>
                 </a:solidFill>
-                <a:latin typeface="Arial" pitchFamily="34" charset="0"/>
-                <a:ea typeface="Arial" pitchFamily="34" charset="-122"/>
-                <a:cs typeface="Arial" pitchFamily="34" charset="-120"/>
-              </a:rPr>
-              <a:t>O percurso marca a lição como feita</a:t>
-            </a:r>
-            <a:endParaRPr lang="en-US" sz="2200" dirty="0"/>
-          </a:p>
-        </p:txBody>
-      </p:sp>
-      <p:sp>
-        <p:nvSpPr>
-          <p:cNvPr id="20" name="Shape 17"/>
-          <p:cNvSpPr/>
-          <p:nvPr/>
-        </p:nvSpPr>
-        <p:spPr>
-          <a:xfrm>
-            <a:off x="8332927" y="1033272"/>
-            <a:ext cx="3145536" cy="3145536"/>
-          </a:xfrm>
-          <a:prstGeom prst="rect">
-            <a:avLst/>
-          </a:prstGeom>
-          <a:solidFill>
-            <a:srgbClr val="FFFFFF"/>
-          </a:solidFill>
-          <a:ln w="12700">
-            <a:solidFill>
-              <a:srgbClr val="F2F0EA"/>
-            </a:solidFill>
-            <a:prstDash val="solid"/>
-          </a:ln>
-        </p:spPr>
-      </p:sp>
-      <p:pic>
-        <p:nvPicPr>
-          <p:cNvPr id="21" name="Image 0" descr="/home/user/epi-portugues-fontes/_interno/biblioteca-imagens/qr/licao-m9-f02.png">    </p:cNvPr>
-          <p:cNvPicPr>
-            <a:picLocks noChangeAspect="1"/>
-          </p:cNvPicPr>
-          <p:nvPr/>
-        </p:nvPicPr>
-        <p:blipFill>
-          <a:blip r:embed="rId1"/>
-          <a:stretch>
-            <a:fillRect/>
-          </a:stretch>
-        </p:blipFill>
-        <p:spPr>
-          <a:xfrm>
-            <a:off x="8442655" y="1143000"/>
-            <a:ext cx="2926080" cy="2926080"/>
-          </a:xfrm>
-          <a:prstGeom prst="rect">
-            <a:avLst/>
-          </a:prstGeom>
-        </p:spPr>
-      </p:pic>
-      <p:sp>
-        <p:nvSpPr>
-          <p:cNvPr id="22" name="Text 18"/>
-          <p:cNvSpPr/>
-          <p:nvPr/>
-        </p:nvSpPr>
-        <p:spPr>
-          <a:xfrm>
-            <a:off x="8332927" y="4343400"/>
-            <a:ext cx="3145536" cy="640080"/>
-          </a:xfrm>
-          <a:prstGeom prst="rect">
-            <a:avLst/>
-          </a:prstGeom>
-          <a:noFill/>
-          <a:ln/>
-        </p:spPr>
-        <p:txBody>
-          <a:bodyPr wrap="square" lIns="0" tIns="0" rIns="0" bIns="0" rtlCol="0" anchor="t">
-            <a:normAutofit/>
-          </a:bodyPr>
-          <a:lstStyle/>
-          <a:p>
-            <a:pPr algn="ctr" indent="0" marL="0">
-              <a:buNone/>
-            </a:pPr>
-            <a:r>
-              <a:rPr lang="en-US" sz="1200" dirty="0">
-                <a:solidFill>
-                  <a:srgbClr val="F2F0EA"/>
-                </a:solidFill>
-                <a:latin typeface="Arial" pitchFamily="34" charset="0"/>
-                <a:ea typeface="Arial" pitchFamily="34" charset="-122"/>
-                <a:cs typeface="Arial" pitchFamily="34" charset="-120"/>
-              </a:rPr>
-              <a:t>pedrohfernandes-klk.github.io/​pt/​m9/​licao-m9-f02/​</a:t>
-            </a:r>
-            <a:endParaRPr lang="en-US" sz="1200" dirty="0"/>
+                <a:latin typeface="Georgia" pitchFamily="34" charset="0"/>
+                <a:ea typeface="Georgia" pitchFamily="34" charset="-122"/>
+                <a:cs typeface="Georgia" pitchFamily="34" charset="-120"/>
+              </a:rPr>
+              <a:t>O romance tem direitos de autor: lê-se no livro ou na folha que o docente entrega.</a:t>
+            </a:r>
+            <a:endParaRPr lang="en-US" sz="2300" dirty="0"/>
           </a:p>
         </p:txBody>
       </p:sp>
@@ -6317,7 +6313,7 @@
                 <a:ea typeface="Arial" pitchFamily="34" charset="-122"/>
                 <a:cs typeface="Arial" pitchFamily="34" charset="-120"/>
               </a:rPr>
-              <a:t>PAUSA: CARTÕES NO TELEMÓVEL</a:t>
+              <a:t>AGORA NO TELEMÓVEL, QUINZE MINUTOS</a:t>
             </a:r>
             <a:endParaRPr lang="en-US" sz="1100" dirty="0"/>
           </a:p>
@@ -6358,7 +6354,7 @@
                 <a:ea typeface="Arial" pitchFamily="34" charset="-122"/>
                 <a:cs typeface="Arial" pitchFamily="34" charset="-120"/>
               </a:rPr>
-              <a:t>Três minutos, com placar</a:t>
+              <a:t>Abre a lição no telemóvel</a:t>
             </a:r>
             <a:endParaRPr lang="en-US" sz="3800" dirty="0"/>
           </a:p>
@@ -6398,7 +6394,7 @@
         <p:spPr>
           <a:xfrm>
             <a:off x="1005840" y="2606040"/>
-            <a:ext cx="0" cy="1424940"/>
+            <a:ext cx="0" cy="1765808"/>
           </a:xfrm>
           <a:prstGeom prst="line">
             <a:avLst/>
@@ -6514,7 +6510,7 @@
                 <a:ea typeface="Arial" pitchFamily="34" charset="-122"/>
                 <a:cs typeface="Arial" pitchFamily="34" charset="-120"/>
               </a:rPr>
-              <a:t>Na lição, toca em «Sala» e escreve o código do ecrã e uma alcunha</a:t>
+              <a:t>Lê e responde aos cartões, um de cada vez</a:t>
             </a:r>
             <a:endParaRPr lang="en-US" sz="2200" dirty="0"/>
           </a:p>
@@ -6593,7 +6589,7 @@
         <p:spPr>
           <a:xfrm>
             <a:off x="1417320" y="3315208"/>
-            <a:ext cx="6430975" cy="542036"/>
+            <a:ext cx="6430975" cy="882904"/>
           </a:xfrm>
           <a:prstGeom prst="rect">
             <a:avLst/>
@@ -6622,7 +6618,7 @@
                 <a:ea typeface="Arial" pitchFamily="34" charset="-122"/>
                 <a:cs typeface="Arial" pitchFamily="34" charset="-120"/>
               </a:rPr>
-              <a:t>Faz os cartões que o ecrã indica</a:t>
+              <a:t>No fim, o cartão extra: «A Biblioteca em Fogo»</a:t>
             </a:r>
             <a:endParaRPr lang="en-US" sz="2200" dirty="0"/>
           </a:p>
@@ -6636,7 +6632,7 @@
         </p:nvSpPr>
         <p:spPr>
           <a:xfrm>
-            <a:off x="822960" y="3848100"/>
+            <a:off x="822960" y="4188968"/>
             <a:ext cx="365760" cy="365760"/>
           </a:xfrm>
           <a:prstGeom prst="ellipse">
@@ -6661,7 +6657,7 @@
         </p:nvSpPr>
         <p:spPr>
           <a:xfrm>
-            <a:off x="822960" y="3848100"/>
+            <a:off x="822960" y="4188968"/>
             <a:ext cx="365760" cy="365760"/>
           </a:xfrm>
           <a:prstGeom prst="rect">
@@ -6700,7 +6696,7 @@
         </p:nvSpPr>
         <p:spPr>
           <a:xfrm>
-            <a:off x="1417320" y="3857244"/>
+            <a:off x="1417320" y="4198112"/>
             <a:ext cx="6430975" cy="542036"/>
           </a:xfrm>
           <a:prstGeom prst="rect">
@@ -6730,7 +6726,7 @@
                 <a:ea typeface="Arial" pitchFamily="34" charset="-122"/>
                 <a:cs typeface="Arial" pitchFamily="34" charset="-120"/>
               </a:rPr>
-              <a:t>Quando acabares, olha para o placar</a:t>
+              <a:t>O percurso marca a lição como feita</a:t>
             </a:r>
             <a:endParaRPr lang="en-US" sz="2200" dirty="0"/>
           </a:p>
@@ -6986,7 +6982,7 @@
             <a:off x="822960" y="502920"/>
             <a:ext cx="201168" cy="201168"/>
           </a:xfrm>
-          <a:prstGeom prst="triangle">
+          <a:prstGeom prst="rect">
             <a:avLst/>
           </a:prstGeom>
           <a:ln w="19050">
@@ -7030,7 +7026,7 @@
                 <a:ea typeface="Arial" pitchFamily="34" charset="-122"/>
                 <a:cs typeface="Arial" pitchFamily="34" charset="-120"/>
               </a:rPr>
-              <a:t>SÍNTESE</a:t>
+              <a:t>PAUSA: CARTÕES NO TELEMÓVEL</a:t>
             </a:r>
             <a:endParaRPr lang="en-US" sz="1100" dirty="0"/>
           </a:p>
@@ -7045,7 +7041,7 @@
         <p:spPr>
           <a:xfrm>
             <a:off x="822960" y="868680"/>
-            <a:ext cx="9814255" cy="822960"/>
+            <a:ext cx="7071055" cy="1188720"/>
           </a:xfrm>
           <a:prstGeom prst="rect">
             <a:avLst/>
@@ -7063,7 +7059,7 @@
               <a:buNone/>
             </a:pPr>
             <a:r>
-              <a:rPr lang="en-US" sz="3400" dirty="0">
+              <a:rPr lang="en-US" sz="3800" dirty="0">
                 <a:solidFill>
                   <a:srgbClr val="F2F0EA"/>
                 </a:solidFill>
@@ -7071,9 +7067,9 @@
                 <a:ea typeface="Arial" pitchFamily="34" charset="-122"/>
                 <a:cs typeface="Arial" pitchFamily="34" charset="-120"/>
               </a:rPr>
-              <a:t>Para fixar</a:t>
-            </a:r>
-            <a:endParaRPr lang="en-US" sz="3400" dirty="0"/>
+              <a:t>Três minutos, com placar</a:t>
+            </a:r>
+            <a:endParaRPr lang="en-US" sz="3800" dirty="0"/>
           </a:p>
         </p:txBody>
       </p:sp>
@@ -7085,7 +7081,7 @@
         </p:nvSpPr>
         <p:spPr>
           <a:xfrm>
-            <a:off x="822960" y="1746504"/>
+            <a:off x="822960" y="2121408"/>
             <a:ext cx="640080" cy="64008"/>
           </a:xfrm>
           <a:prstGeom prst="rect">
@@ -7110,8 +7106,8 @@
         </p:nvSpPr>
         <p:spPr>
           <a:xfrm>
-            <a:off x="1005840" y="2286000"/>
-            <a:ext cx="0" cy="2447544"/>
+            <a:off x="1005840" y="2606040"/>
+            <a:ext cx="0" cy="1424940"/>
           </a:xfrm>
           <a:prstGeom prst="line">
             <a:avLst/>
@@ -7133,7 +7129,7 @@
         </p:nvSpPr>
         <p:spPr>
           <a:xfrm>
-            <a:off x="822960" y="2103120"/>
+            <a:off x="822960" y="2423160"/>
             <a:ext cx="365760" cy="365760"/>
           </a:xfrm>
           <a:prstGeom prst="ellipse">
@@ -7158,7 +7154,7 @@
         </p:nvSpPr>
         <p:spPr>
           <a:xfrm>
-            <a:off x="822960" y="2103120"/>
+            <a:off x="822960" y="2423160"/>
             <a:ext cx="365760" cy="365760"/>
           </a:xfrm>
           <a:prstGeom prst="rect">
@@ -7197,8 +7193,8 @@
         </p:nvSpPr>
         <p:spPr>
           <a:xfrm>
-            <a:off x="1417320" y="2112264"/>
-            <a:ext cx="9174175" cy="1223772"/>
+            <a:off x="1417320" y="2432304"/>
+            <a:ext cx="6430975" cy="882904"/>
           </a:xfrm>
           <a:prstGeom prst="rect">
             <a:avLst/>
@@ -7227,7 +7223,7 @@
                 <a:ea typeface="Arial" pitchFamily="34" charset="-122"/>
                 <a:cs typeface="Arial" pitchFamily="34" charset="-120"/>
               </a:rPr>
-              <a:t>Trabalhaste o trio da passarola: o engenho do padre Bartolomeu Lourenço, os olhos de Blimunda, que recolhem vontades em jejum, e a mão direita de Baltasar, que construiu.</a:t>
+              <a:t>Na lição, toca em «Sala» e escreve o código do ecrã e uma alcunha</a:t>
             </a:r>
             <a:endParaRPr lang="en-US" sz="2200" dirty="0"/>
           </a:p>
@@ -7241,7 +7237,7 @@
         </p:nvSpPr>
         <p:spPr>
           <a:xfrm>
-            <a:off x="822960" y="3326892"/>
+            <a:off x="822960" y="3306064"/>
             <a:ext cx="365760" cy="365760"/>
           </a:xfrm>
           <a:prstGeom prst="ellipse">
@@ -7266,7 +7262,7 @@
         </p:nvSpPr>
         <p:spPr>
           <a:xfrm>
-            <a:off x="822960" y="3326892"/>
+            <a:off x="822960" y="3306064"/>
             <a:ext cx="365760" cy="365760"/>
           </a:xfrm>
           <a:prstGeom prst="rect">
@@ -7305,8 +7301,8 @@
         </p:nvSpPr>
         <p:spPr>
           <a:xfrm>
-            <a:off x="1417320" y="3336036"/>
-            <a:ext cx="9174175" cy="1223772"/>
+            <a:off x="1417320" y="3315208"/>
+            <a:ext cx="6430975" cy="542036"/>
           </a:xfrm>
           <a:prstGeom prst="rect">
             <a:avLst/>
@@ -7335,7 +7331,7 @@
                 <a:ea typeface="Arial" pitchFamily="34" charset="-122"/>
                 <a:cs typeface="Arial" pitchFamily="34" charset="-120"/>
               </a:rPr>
-              <a:t>A passarola é um símbolo: representa o sonho, a liberdade e a ciência, enquanto o convento representa o poder, a vaidade régia e o sacrifício de milhares.</a:t>
+              <a:t>Faz os cartões que o ecrã indica</a:t>
             </a:r>
             <a:endParaRPr lang="en-US" sz="2200" dirty="0"/>
           </a:p>
@@ -7349,7 +7345,7 @@
         </p:nvSpPr>
         <p:spPr>
           <a:xfrm>
-            <a:off x="822960" y="4550664"/>
+            <a:off x="822960" y="3848100"/>
             <a:ext cx="365760" cy="365760"/>
           </a:xfrm>
           <a:prstGeom prst="ellipse">
@@ -7374,7 +7370,7 @@
         </p:nvSpPr>
         <p:spPr>
           <a:xfrm>
-            <a:off x="822960" y="4550664"/>
+            <a:off x="822960" y="3848100"/>
             <a:ext cx="365760" cy="365760"/>
           </a:xfrm>
           <a:prstGeom prst="rect">
@@ -7413,8 +7409,8 @@
         </p:nvSpPr>
         <p:spPr>
           <a:xfrm>
-            <a:off x="1417320" y="4559808"/>
-            <a:ext cx="9174175" cy="1223772"/>
+            <a:off x="1417320" y="3857244"/>
+            <a:ext cx="6430975" cy="542036"/>
           </a:xfrm>
           <a:prstGeom prst="rect">
             <a:avLst/>
@@ -7443,9 +7439,99 @@
                 <a:ea typeface="Arial" pitchFamily="34" charset="-122"/>
                 <a:cs typeface="Arial" pitchFamily="34" charset="-120"/>
               </a:rPr>
-              <a:t>No capítulo XXV, Blimunda chega a Lisboa em jejum, vê a vontade de Baltasar num auto de fé e chama-a: a vontade fica na terra, com ela.</a:t>
+              <a:t>Quando acabares, olha para o placar</a:t>
             </a:r>
             <a:endParaRPr lang="en-US" sz="2200" dirty="0"/>
+          </a:p>
+        </p:txBody>
+      </p:sp>
+      <p:sp>
+        <p:nvSpPr>
+          <p:cNvPr id="20" name="Shape 17"/>
+          <p:cNvSpPr/>
+          <p:nvPr/>
+        </p:nvSpPr>
+        <p:spPr>
+          <a:xfrm>
+            <a:off x="8332927" y="1033272"/>
+            <a:ext cx="3145536" cy="3145536"/>
+          </a:xfrm>
+          <a:prstGeom prst="rect">
+            <a:avLst/>
+          </a:prstGeom>
+          <a:solidFill>
+            <a:srgbClr val="FFFFFF"/>
+          </a:solidFill>
+          <a:ln w="12700">
+            <a:solidFill>
+              <a:srgbClr val="F2F0EA"/>
+            </a:solidFill>
+            <a:prstDash val="solid"/>
+          </a:ln>
+        </p:spPr>
+      </p:sp>
+      <p:pic>
+        <p:nvPicPr>
+          <p:cNvPr id="21" name="Image 0" descr="/home/user/epi-portugues-fontes/_interno/biblioteca-imagens/qr/licao-m9-f02.png">    </p:cNvPr>
+          <p:cNvPicPr>
+            <a:picLocks noChangeAspect="1"/>
+          </p:cNvPicPr>
+          <p:nvPr/>
+        </p:nvPicPr>
+        <p:blipFill>
+          <a:blip r:embed="rId1"/>
+          <a:stretch>
+            <a:fillRect/>
+          </a:stretch>
+        </p:blipFill>
+        <p:spPr>
+          <a:xfrm>
+            <a:off x="8442655" y="1143000"/>
+            <a:ext cx="2926080" cy="2926080"/>
+          </a:xfrm>
+          <a:prstGeom prst="rect">
+            <a:avLst/>
+          </a:prstGeom>
+        </p:spPr>
+      </p:pic>
+      <p:sp>
+        <p:nvSpPr>
+          <p:cNvPr id="22" name="Text 18"/>
+          <p:cNvSpPr/>
+          <p:nvPr/>
+        </p:nvSpPr>
+        <p:spPr>
+          <a:xfrm>
+            <a:off x="8332927" y="4343400"/>
+            <a:ext cx="3145536" cy="640080"/>
+          </a:xfrm>
+          <a:prstGeom prst="rect">
+            <a:avLst/>
+          </a:prstGeom>
+          <a:noFill/>
+          <a:ln/>
+        </p:spPr>
+        <p:txBody>
+          <a:bodyPr wrap="square" lIns="0" tIns="0" rIns="0" bIns="0" rtlCol="0" anchor="t">
+            <a:normAutofit/>
+          </a:bodyPr>
+          <a:lstStyle/>
+          <a:p>
+            <a:pPr algn="ctr" indent="0" marL="0">
+              <a:buNone/>
+            </a:pPr>
+            <a:r>
+              <a:rPr lang="en-US" sz="1200" dirty="0">
+                <a:solidFill>
+                  <a:srgbClr val="F2F0EA"/>
+                </a:solidFill>
+                <a:latin typeface="Arial" pitchFamily="34" charset="0"/>
+                <a:ea typeface="Arial" pitchFamily="34" charset="-122"/>
+                <a:cs typeface="Arial" pitchFamily="34" charset="-120"/>
+              </a:rPr>
+              <a:t>pedrohfernandes-klk.github.io/​pt/​m9/​licao-m9-f02/​</a:t>
+            </a:r>
+            <a:endParaRPr lang="en-US" sz="1200" dirty="0"/>
           </a:p>
         </p:txBody>
       </p:sp>

--- a/m9/diapositivos/sessao-02-m9-f02.pptx
+++ b/m9/diapositivos/sessao-02-m9-f02.pptx
@@ -3222,7 +3222,35 @@
                 <a:ea typeface="Arial" pitchFamily="34" charset="-122"/>
                 <a:cs typeface="Arial" pitchFamily="34" charset="-120"/>
               </a:rPr>
-              <a:t>José Saramago, Memorial do Convento (1982), capítulo XVI. grafia da edição. Excerto para estudo.</a:t>
+              <a:t>José Saramago, </a:t>
+            </a:r>
+            <a:pPr indent="0" marL="0">
+              <a:buNone/>
+            </a:pPr>
+            <a:r>
+              <a:rPr lang="en-US" sz="1200" i="1" dirty="0">
+                <a:solidFill>
+                  <a:srgbClr val="A9A79F"/>
+                </a:solidFill>
+                <a:latin typeface="Arial" pitchFamily="34" charset="0"/>
+                <a:ea typeface="Arial" pitchFamily="34" charset="-122"/>
+                <a:cs typeface="Arial" pitchFamily="34" charset="-120"/>
+              </a:rPr>
+              <a:t>Memorial do Convento</a:t>
+            </a:r>
+            <a:pPr indent="0" marL="0">
+              <a:buNone/>
+            </a:pPr>
+            <a:r>
+              <a:rPr lang="en-US" sz="1200" dirty="0">
+                <a:solidFill>
+                  <a:srgbClr val="A9A79F"/>
+                </a:solidFill>
+                <a:latin typeface="Arial" pitchFamily="34" charset="0"/>
+                <a:ea typeface="Arial" pitchFamily="34" charset="-122"/>
+                <a:cs typeface="Arial" pitchFamily="34" charset="-120"/>
+              </a:rPr>
+              <a:t> (1982), capítulo XVI. grafia da edição. Excerto para estudo.</a:t>
             </a:r>
             <a:endParaRPr lang="en-US" sz="1200" dirty="0"/>
           </a:p>
@@ -3542,7 +3570,35 @@
                 <a:ea typeface="Arial" pitchFamily="34" charset="-122"/>
                 <a:cs typeface="Arial" pitchFamily="34" charset="-120"/>
               </a:rPr>
-              <a:t>José Saramago, Memorial do Convento (1982), último capítulo (excerto). Excerto para estudo.</a:t>
+              <a:t>José Saramago, </a:t>
+            </a:r>
+            <a:pPr indent="0" marL="0">
+              <a:buNone/>
+            </a:pPr>
+            <a:r>
+              <a:rPr lang="en-US" sz="1200" i="1" dirty="0">
+                <a:solidFill>
+                  <a:srgbClr val="A9A79F"/>
+                </a:solidFill>
+                <a:latin typeface="Arial" pitchFamily="34" charset="0"/>
+                <a:ea typeface="Arial" pitchFamily="34" charset="-122"/>
+                <a:cs typeface="Arial" pitchFamily="34" charset="-120"/>
+              </a:rPr>
+              <a:t>Memorial do Convento</a:t>
+            </a:r>
+            <a:pPr indent="0" marL="0">
+              <a:buNone/>
+            </a:pPr>
+            <a:r>
+              <a:rPr lang="en-US" sz="1200" dirty="0">
+                <a:solidFill>
+                  <a:srgbClr val="A9A79F"/>
+                </a:solidFill>
+                <a:latin typeface="Arial" pitchFamily="34" charset="0"/>
+                <a:ea typeface="Arial" pitchFamily="34" charset="-122"/>
+                <a:cs typeface="Arial" pitchFamily="34" charset="-120"/>
+              </a:rPr>
+              <a:t> (1982), último capítulo (excerto). Excerto para estudo.</a:t>
             </a:r>
             <a:endParaRPr lang="en-US" sz="1200" dirty="0"/>
           </a:p>
@@ -6043,9 +6099,6 @@
               <a:lnSpc>
                 <a:spcPct val="120000"/>
               </a:lnSpc>
-              <a:spcAft>
-                <a:spcPts val="1000"/>
-              </a:spcAft>
               <a:buNone/>
             </a:pPr>
             <a:r>
@@ -6057,22 +6110,16 @@
                 <a:ea typeface="Georgia" pitchFamily="34" charset="-122"/>
                 <a:cs typeface="Georgia" pitchFamily="34" charset="-120"/>
               </a:rPr>
-              <a:t>Duas passagens para leres no livro antes das perguntas. O voo da passarola (nas edições da Caminho, pp. 196 e 197): a máquina sobe, o padre Bartolomeu Lourenço vê Lisboa e o mar lá de cima e diz a quem deve o voo.</a:t>
-            </a:r>
-            <a:endParaRPr lang="en-US" sz="2300" dirty="0"/>
-          </a:p>
-          <a:p>
+              <a:t>Duas passagens para leres no livro antes das perguntas. </a:t>
+            </a:r>
             <a:pPr indent="0" marL="0">
               <a:lnSpc>
                 <a:spcPct val="120000"/>
               </a:lnSpc>
-              <a:spcAft>
-                <a:spcPts val="1000"/>
-              </a:spcAft>
-              <a:buNone/>
-            </a:pPr>
-            <a:r>
-              <a:rPr lang="en-US" sz="2300" dirty="0">
+              <a:buNone/>
+            </a:pPr>
+            <a:r>
+              <a:rPr lang="en-US" sz="2300" b="1" dirty="0">
                 <a:solidFill>
                   <a:srgbClr val="F2F0EA"/>
                 </a:solidFill>
@@ -6080,18 +6127,12 @@
                 <a:ea typeface="Georgia" pitchFamily="34" charset="-122"/>
                 <a:cs typeface="Georgia" pitchFamily="34" charset="-120"/>
               </a:rPr>
-              <a:t>O reencontro (capítulo XXV, o último): Blimunda procura Baltasar durante nove anos e encontra-o em Lisboa, num auto de fé; chega em jejum.</a:t>
-            </a:r>
-            <a:endParaRPr lang="en-US" sz="2300" dirty="0"/>
-          </a:p>
-          <a:p>
+              <a:t>O voo da passarola</a:t>
+            </a:r>
             <a:pPr indent="0" marL="0">
               <a:lnSpc>
                 <a:spcPct val="120000"/>
               </a:lnSpc>
-              <a:spcAft>
-                <a:spcPts val="1000"/>
-              </a:spcAft>
               <a:buNone/>
             </a:pPr>
             <a:r>
@@ -6103,7 +6144,41 @@
                 <a:ea typeface="Georgia" pitchFamily="34" charset="-122"/>
                 <a:cs typeface="Georgia" pitchFamily="34" charset="-120"/>
               </a:rPr>
-              <a:t>O romance tem direitos de autor: lê-se no livro ou na folha que o docente entrega.</a:t>
+              <a:t> (nas edições da Caminho, pp. 196 e 197): a máquina sobe, o padre Bartolomeu Lourenço vê Lisboa e o mar lá de cima e diz a quem deve o voo. </a:t>
+            </a:r>
+            <a:pPr indent="0" marL="0">
+              <a:lnSpc>
+                <a:spcPct val="120000"/>
+              </a:lnSpc>
+              <a:buNone/>
+            </a:pPr>
+            <a:r>
+              <a:rPr lang="en-US" sz="2300" b="1" dirty="0">
+                <a:solidFill>
+                  <a:srgbClr val="F2F0EA"/>
+                </a:solidFill>
+                <a:latin typeface="Georgia" pitchFamily="34" charset="0"/>
+                <a:ea typeface="Georgia" pitchFamily="34" charset="-122"/>
+                <a:cs typeface="Georgia" pitchFamily="34" charset="-120"/>
+              </a:rPr>
+              <a:t>O reencontro</a:t>
+            </a:r>
+            <a:pPr indent="0" marL="0">
+              <a:lnSpc>
+                <a:spcPct val="120000"/>
+              </a:lnSpc>
+              <a:buNone/>
+            </a:pPr>
+            <a:r>
+              <a:rPr lang="en-US" sz="2300" dirty="0">
+                <a:solidFill>
+                  <a:srgbClr val="F2F0EA"/>
+                </a:solidFill>
+                <a:latin typeface="Georgia" pitchFamily="34" charset="0"/>
+                <a:ea typeface="Georgia" pitchFamily="34" charset="-122"/>
+                <a:cs typeface="Georgia" pitchFamily="34" charset="-120"/>
+              </a:rPr>
+              <a:t> (capítulo XXV, o último): Blimunda procura Baltasar durante nove anos e encontra-o em Lisboa, num auto de fé; chega em jejum. Os excertos que lês a seguir são para estudo. O romance tem direitos de autor e lê-se inteiro no livro.</a:t>
             </a:r>
             <a:endParaRPr lang="en-US" sz="2300" dirty="0"/>
           </a:p>

--- a/m9/diapositivos/sessao-02-m9-f02.pptx
+++ b/m9/diapositivos/sessao-02-m9-f02.pptx
@@ -16,9 +16,10 @@
     <p:sldId id="264" r:id="rId10"/>
     <p:sldId id="265" r:id="rId11"/>
     <p:sldId id="266" r:id="rId12"/>
+    <p:sldId id="267" r:id="rId13"/>
   </p:sldIdLst>
   <p:notesMasterIdLst>
-    <p:notesMasterId r:id="rId13"/>
+    <p:notesMasterId r:id="rId14"/>
   </p:notesMasterIdLst>
   <p:sldSz cx="12192000" cy="6858000"/>
   <p:notesSz cx="6858000" cy="12192000"/>
@@ -1497,7 +1498,7 @@
                 <a:ea typeface="Arial" pitchFamily="34" charset="-122"/>
                 <a:cs typeface="Arial" pitchFamily="34" charset="-120"/>
               </a:rPr>
-              <a:t>SÍNTESE</a:t>
+              <a:t>NO ATLAS LUSÓFONO (OPCIONAL)</a:t>
             </a:r>
             <a:endParaRPr lang="en-US" sz="1100" dirty="0"/>
           </a:p>
@@ -1538,7 +1539,7 @@
                 <a:ea typeface="Arial" pitchFamily="34" charset="-122"/>
                 <a:cs typeface="Arial" pitchFamily="34" charset="-120"/>
               </a:rPr>
-              <a:t>Para fixar</a:t>
+              <a:t>Bartolomeu de Gusmão, Brasil</a:t>
             </a:r>
             <a:endParaRPr lang="en-US" sz="3400" dirty="0"/>
           </a:p>
@@ -1571,101 +1572,14 @@
       </p:sp>
       <p:sp>
         <p:nvSpPr>
-          <p:cNvPr id="10" name="Shape 7"/>
-          <p:cNvSpPr/>
-          <p:nvPr/>
-        </p:nvSpPr>
-        <p:spPr>
-          <a:xfrm>
-            <a:off x="1005840" y="2286000"/>
-            <a:ext cx="0" cy="2447544"/>
-          </a:xfrm>
-          <a:prstGeom prst="line">
-            <a:avLst/>
-          </a:prstGeom>
-          <a:noFill/>
-          <a:ln w="12700">
-            <a:solidFill>
-              <a:srgbClr val="A9A79F"/>
-            </a:solidFill>
-            <a:prstDash val="solid"/>
-          </a:ln>
-        </p:spPr>
-      </p:sp>
-      <p:sp>
-        <p:nvSpPr>
-          <p:cNvPr id="11" name="Shape 8"/>
-          <p:cNvSpPr/>
-          <p:nvPr/>
-        </p:nvSpPr>
-        <p:spPr>
-          <a:xfrm>
-            <a:off x="822960" y="2103120"/>
-            <a:ext cx="365760" cy="365760"/>
-          </a:xfrm>
-          <a:prstGeom prst="ellipse">
-            <a:avLst/>
-          </a:prstGeom>
-          <a:solidFill>
-            <a:srgbClr val="111111"/>
-          </a:solidFill>
-          <a:ln w="15875">
-            <a:solidFill>
-              <a:srgbClr val="F2F0EA"/>
-            </a:solidFill>
-            <a:prstDash val="solid"/>
-          </a:ln>
-        </p:spPr>
-      </p:sp>
-      <p:sp>
-        <p:nvSpPr>
-          <p:cNvPr id="12" name="Text 9"/>
-          <p:cNvSpPr/>
-          <p:nvPr/>
-        </p:nvSpPr>
-        <p:spPr>
-          <a:xfrm>
-            <a:off x="822960" y="2103120"/>
-            <a:ext cx="365760" cy="365760"/>
-          </a:xfrm>
-          <a:prstGeom prst="rect">
-            <a:avLst/>
-          </a:prstGeom>
-          <a:noFill/>
-          <a:ln/>
-        </p:spPr>
-        <p:txBody>
-          <a:bodyPr wrap="square" lIns="0" tIns="0" rIns="0" bIns="0" rtlCol="0" anchor="ctr"/>
-          <a:lstStyle/>
-          <a:p>
-            <a:pPr algn="ctr" indent="0" marL="0">
-              <a:buNone/>
-            </a:pPr>
-            <a:r>
-              <a:rPr lang="en-US" sz="1300" b="1" dirty="0">
-                <a:solidFill>
-                  <a:srgbClr val="F2F0EA"/>
-                </a:solidFill>
-                <a:latin typeface="Arial" pitchFamily="34" charset="0"/>
-                <a:ea typeface="Arial" pitchFamily="34" charset="-122"/>
-                <a:cs typeface="Arial" pitchFamily="34" charset="-120"/>
-              </a:rPr>
-              <a:t>1</a:t>
-            </a:r>
-            <a:endParaRPr lang="en-US" sz="1300" dirty="0"/>
-          </a:p>
-        </p:txBody>
-      </p:sp>
-      <p:sp>
-        <p:nvSpPr>
-          <p:cNvPr id="13" name="Text 10"/>
-          <p:cNvSpPr/>
-          <p:nvPr/>
-        </p:nvSpPr>
-        <p:spPr>
-          <a:xfrm>
-            <a:off x="1417320" y="2112264"/>
-            <a:ext cx="9174175" cy="1223772"/>
+          <p:cNvPr id="10" name="Text 7"/>
+          <p:cNvSpPr/>
+          <p:nvPr/>
+        </p:nvSpPr>
+        <p:spPr>
+          <a:xfrm>
+            <a:off x="822960" y="2057400"/>
+            <a:ext cx="9814255" cy="4023360"/>
           </a:xfrm>
           <a:prstGeom prst="rect">
             <a:avLst/>
@@ -1681,238 +1595,65 @@
           <a:p>
             <a:pPr indent="0" marL="0">
               <a:lnSpc>
-                <a:spcPct val="105000"/>
+                <a:spcPct val="110000"/>
               </a:lnSpc>
-              <a:buNone/>
-            </a:pPr>
-            <a:r>
-              <a:rPr lang="en-US" sz="2200" dirty="0">
+              <a:spcAft>
+                <a:spcPts val="1400"/>
+              </a:spcAft>
+              <a:buNone/>
+            </a:pPr>
+            <a:r>
+              <a:rPr lang="en-US" sz="2800" dirty="0">
                 <a:solidFill>
                   <a:srgbClr val="F2F0EA"/>
                 </a:solidFill>
-                <a:latin typeface="Arial" pitchFamily="34" charset="0"/>
-                <a:ea typeface="Arial" pitchFamily="34" charset="-122"/>
-                <a:cs typeface="Arial" pitchFamily="34" charset="-120"/>
-              </a:rPr>
-              <a:t>Trabalhaste o trio da passarola: o engenho do padre Bartolomeu Lourenço, os olhos de Blimunda, que recolhem vontades em jejum, e a mão direita de Baltasar, que construiu.</a:t>
-            </a:r>
-            <a:endParaRPr lang="en-US" sz="2200" dirty="0"/>
-          </a:p>
-        </p:txBody>
-      </p:sp>
-      <p:sp>
-        <p:nvSpPr>
-          <p:cNvPr id="14" name="Shape 11"/>
-          <p:cNvSpPr/>
-          <p:nvPr/>
-        </p:nvSpPr>
-        <p:spPr>
-          <a:xfrm>
-            <a:off x="822960" y="3326892"/>
-            <a:ext cx="365760" cy="365760"/>
-          </a:xfrm>
-          <a:prstGeom prst="ellipse">
-            <a:avLst/>
-          </a:prstGeom>
-          <a:solidFill>
-            <a:srgbClr val="111111"/>
-          </a:solidFill>
-          <a:ln w="15875">
-            <a:solidFill>
-              <a:srgbClr val="F2F0EA"/>
-            </a:solidFill>
-            <a:prstDash val="solid"/>
-          </a:ln>
-        </p:spPr>
-      </p:sp>
-      <p:sp>
-        <p:nvSpPr>
-          <p:cNvPr id="15" name="Text 12"/>
-          <p:cNvSpPr/>
-          <p:nvPr/>
-        </p:nvSpPr>
-        <p:spPr>
-          <a:xfrm>
-            <a:off x="822960" y="3326892"/>
-            <a:ext cx="365760" cy="365760"/>
-          </a:xfrm>
-          <a:prstGeom prst="rect">
-            <a:avLst/>
-          </a:prstGeom>
-          <a:noFill/>
-          <a:ln/>
-        </p:spPr>
-        <p:txBody>
-          <a:bodyPr wrap="square" lIns="0" tIns="0" rIns="0" bIns="0" rtlCol="0" anchor="ctr"/>
-          <a:lstStyle/>
-          <a:p>
-            <a:pPr algn="ctr" indent="0" marL="0">
-              <a:buNone/>
-            </a:pPr>
-            <a:r>
-              <a:rPr lang="en-US" sz="1300" b="1" dirty="0">
-                <a:solidFill>
-                  <a:srgbClr val="F2F0EA"/>
-                </a:solidFill>
-                <a:latin typeface="Arial" pitchFamily="34" charset="0"/>
-                <a:ea typeface="Arial" pitchFamily="34" charset="-122"/>
-                <a:cs typeface="Arial" pitchFamily="34" charset="-120"/>
-              </a:rPr>
-              <a:t>2</a:t>
-            </a:r>
-            <a:endParaRPr lang="en-US" sz="1300" dirty="0"/>
-          </a:p>
-        </p:txBody>
-      </p:sp>
-      <p:sp>
-        <p:nvSpPr>
-          <p:cNvPr id="16" name="Text 13"/>
-          <p:cNvSpPr/>
-          <p:nvPr/>
-        </p:nvSpPr>
-        <p:spPr>
-          <a:xfrm>
-            <a:off x="1417320" y="3336036"/>
-            <a:ext cx="9174175" cy="1223772"/>
-          </a:xfrm>
-          <a:prstGeom prst="rect">
-            <a:avLst/>
-          </a:prstGeom>
-          <a:noFill/>
-          <a:ln/>
-        </p:spPr>
-        <p:txBody>
-          <a:bodyPr wrap="square" lIns="0" tIns="0" rIns="0" bIns="0" rtlCol="0" anchor="t">
-            <a:normAutofit/>
-          </a:bodyPr>
-          <a:lstStyle/>
-          <a:p>
+                <a:latin typeface="Georgia" pitchFamily="34" charset="0"/>
+                <a:ea typeface="Georgia" pitchFamily="34" charset="-122"/>
+                <a:cs typeface="Georgia" pitchFamily="34" charset="-120"/>
+              </a:rPr>
+              <a:t>O padre Bartolomeu Lourenço do </a:t>
+            </a:r>
             <a:pPr indent="0" marL="0">
               <a:lnSpc>
-                <a:spcPct val="105000"/>
+                <a:spcPct val="110000"/>
               </a:lnSpc>
-              <a:buNone/>
-            </a:pPr>
-            <a:r>
-              <a:rPr lang="en-US" sz="2200" dirty="0">
+              <a:spcAft>
+                <a:spcPts val="1400"/>
+              </a:spcAft>
+              <a:buNone/>
+            </a:pPr>
+            <a:r>
+              <a:rPr lang="en-US" sz="2800" i="1" dirty="0">
                 <a:solidFill>
                   <a:srgbClr val="F2F0EA"/>
                 </a:solidFill>
-                <a:latin typeface="Arial" pitchFamily="34" charset="0"/>
-                <a:ea typeface="Arial" pitchFamily="34" charset="-122"/>
-                <a:cs typeface="Arial" pitchFamily="34" charset="-120"/>
-              </a:rPr>
-              <a:t>A passarola é um símbolo: representa o sonho, a liberdade e a ciência, enquanto o convento representa o poder, a vaidade régia e o sacrifício de milhares.</a:t>
-            </a:r>
-            <a:endParaRPr lang="en-US" sz="2200" dirty="0"/>
-          </a:p>
-        </p:txBody>
-      </p:sp>
-      <p:sp>
-        <p:nvSpPr>
-          <p:cNvPr id="17" name="Shape 14"/>
-          <p:cNvSpPr/>
-          <p:nvPr/>
-        </p:nvSpPr>
-        <p:spPr>
-          <a:xfrm>
-            <a:off x="822960" y="4550664"/>
-            <a:ext cx="365760" cy="365760"/>
-          </a:xfrm>
-          <a:prstGeom prst="ellipse">
-            <a:avLst/>
-          </a:prstGeom>
-          <a:solidFill>
-            <a:srgbClr val="111111"/>
-          </a:solidFill>
-          <a:ln w="15875">
-            <a:solidFill>
-              <a:srgbClr val="F2F0EA"/>
-            </a:solidFill>
-            <a:prstDash val="solid"/>
-          </a:ln>
-        </p:spPr>
-      </p:sp>
-      <p:sp>
-        <p:nvSpPr>
-          <p:cNvPr id="18" name="Text 15"/>
-          <p:cNvSpPr/>
-          <p:nvPr/>
-        </p:nvSpPr>
-        <p:spPr>
-          <a:xfrm>
-            <a:off x="822960" y="4550664"/>
-            <a:ext cx="365760" cy="365760"/>
-          </a:xfrm>
-          <a:prstGeom prst="rect">
-            <a:avLst/>
-          </a:prstGeom>
-          <a:noFill/>
-          <a:ln/>
-        </p:spPr>
-        <p:txBody>
-          <a:bodyPr wrap="square" lIns="0" tIns="0" rIns="0" bIns="0" rtlCol="0" anchor="ctr"/>
-          <a:lstStyle/>
-          <a:p>
-            <a:pPr algn="ctr" indent="0" marL="0">
-              <a:buNone/>
-            </a:pPr>
-            <a:r>
-              <a:rPr lang="en-US" sz="1300" b="1" dirty="0">
-                <a:solidFill>
-                  <a:srgbClr val="F2F0EA"/>
-                </a:solidFill>
-                <a:latin typeface="Arial" pitchFamily="34" charset="0"/>
-                <a:ea typeface="Arial" pitchFamily="34" charset="-122"/>
-                <a:cs typeface="Arial" pitchFamily="34" charset="-120"/>
-              </a:rPr>
-              <a:t>3</a:t>
-            </a:r>
-            <a:endParaRPr lang="en-US" sz="1300" dirty="0"/>
-          </a:p>
-        </p:txBody>
-      </p:sp>
-      <p:sp>
-        <p:nvSpPr>
-          <p:cNvPr id="19" name="Text 16"/>
-          <p:cNvSpPr/>
-          <p:nvPr/>
-        </p:nvSpPr>
-        <p:spPr>
-          <a:xfrm>
-            <a:off x="1417320" y="4559808"/>
-            <a:ext cx="9174175" cy="1223772"/>
-          </a:xfrm>
-          <a:prstGeom prst="rect">
-            <a:avLst/>
-          </a:prstGeom>
-          <a:noFill/>
-          <a:ln/>
-        </p:spPr>
-        <p:txBody>
-          <a:bodyPr wrap="square" lIns="0" tIns="0" rIns="0" bIns="0" rtlCol="0" anchor="t">
-            <a:normAutofit/>
-          </a:bodyPr>
-          <a:lstStyle/>
-          <a:p>
+                <a:latin typeface="Georgia" pitchFamily="34" charset="0"/>
+                <a:ea typeface="Georgia" pitchFamily="34" charset="-122"/>
+                <a:cs typeface="Georgia" pitchFamily="34" charset="-120"/>
+              </a:rPr>
+              <a:t>Memorial</a:t>
+            </a:r>
             <a:pPr indent="0" marL="0">
               <a:lnSpc>
-                <a:spcPct val="105000"/>
+                <a:spcPct val="110000"/>
               </a:lnSpc>
-              <a:buNone/>
-            </a:pPr>
-            <a:r>
-              <a:rPr lang="en-US" sz="2200" dirty="0">
+              <a:spcAft>
+                <a:spcPts val="1400"/>
+              </a:spcAft>
+              <a:buNone/>
+            </a:pPr>
+            <a:r>
+              <a:rPr lang="en-US" sz="2800" dirty="0">
                 <a:solidFill>
                   <a:srgbClr val="F2F0EA"/>
                 </a:solidFill>
-                <a:latin typeface="Arial" pitchFamily="34" charset="0"/>
-                <a:ea typeface="Arial" pitchFamily="34" charset="-122"/>
-                <a:cs typeface="Arial" pitchFamily="34" charset="-120"/>
-              </a:rPr>
-              <a:t>No capítulo XXV, Blimunda chega a Lisboa em jejum, vê a vontade de Baltasar num auto de fé e chama-a: a vontade fica na terra, com ela.</a:t>
-            </a:r>
-            <a:endParaRPr lang="en-US" sz="2200" dirty="0"/>
+                <a:latin typeface="Georgia" pitchFamily="34" charset="0"/>
+                <a:ea typeface="Georgia" pitchFamily="34" charset="-122"/>
+                <a:cs typeface="Georgia" pitchFamily="34" charset="-120"/>
+              </a:rPr>
+              <a:t> é Bartolomeu de Gusmão, nascido no Brasil, que em 1709 fez subir um pequeno balão diante de D. João V e da corte.</a:t>
+            </a:r>
+            <a:endParaRPr lang="en-US" sz="2800" dirty="0"/>
           </a:p>
         </p:txBody>
       </p:sp>
@@ -2060,6 +1801,629 @@
                 <a:cs typeface="Arial" pitchFamily="34" charset="-120"/>
               </a:rPr>
               <a:t>11</a:t>
+            </a:r>
+            <a:endParaRPr lang="en-US" sz="1000" dirty="0"/>
+          </a:p>
+        </p:txBody>
+      </p:sp>
+      <p:sp>
+        <p:nvSpPr>
+          <p:cNvPr id="6" name="Shape 3"/>
+          <p:cNvSpPr/>
+          <p:nvPr/>
+        </p:nvSpPr>
+        <p:spPr>
+          <a:xfrm>
+            <a:off x="822960" y="502920"/>
+            <a:ext cx="201168" cy="201168"/>
+          </a:xfrm>
+          <a:prstGeom prst="triangle">
+            <a:avLst/>
+          </a:prstGeom>
+          <a:ln w="19050">
+            <a:solidFill>
+              <a:srgbClr val="F2F0EA"/>
+            </a:solidFill>
+            <a:prstDash val="solid"/>
+          </a:ln>
+        </p:spPr>
+      </p:sp>
+      <p:sp>
+        <p:nvSpPr>
+          <p:cNvPr id="7" name="Text 4"/>
+          <p:cNvSpPr/>
+          <p:nvPr/>
+        </p:nvSpPr>
+        <p:spPr>
+          <a:xfrm>
+            <a:off x="1188720" y="457200"/>
+            <a:ext cx="9448495" cy="292608"/>
+          </a:xfrm>
+          <a:prstGeom prst="rect">
+            <a:avLst/>
+          </a:prstGeom>
+          <a:noFill/>
+          <a:ln/>
+        </p:spPr>
+        <p:txBody>
+          <a:bodyPr wrap="square" lIns="0" tIns="0" rIns="0" bIns="0" rtlCol="0" anchor="ctr"/>
+          <a:lstStyle/>
+          <a:p>
+            <a:pPr indent="0" marL="0">
+              <a:buNone/>
+            </a:pPr>
+            <a:r>
+              <a:rPr lang="en-US" sz="1100" b="1" spc="250" kern="0" dirty="0">
+                <a:solidFill>
+                  <a:srgbClr val="A9A79F"/>
+                </a:solidFill>
+                <a:latin typeface="Arial" pitchFamily="34" charset="0"/>
+                <a:ea typeface="Arial" pitchFamily="34" charset="-122"/>
+                <a:cs typeface="Arial" pitchFamily="34" charset="-120"/>
+              </a:rPr>
+              <a:t>SÍNTESE</a:t>
+            </a:r>
+            <a:endParaRPr lang="en-US" sz="1100" dirty="0"/>
+          </a:p>
+        </p:txBody>
+      </p:sp>
+      <p:sp>
+        <p:nvSpPr>
+          <p:cNvPr id="8" name="Text 5"/>
+          <p:cNvSpPr/>
+          <p:nvPr/>
+        </p:nvSpPr>
+        <p:spPr>
+          <a:xfrm>
+            <a:off x="822960" y="868680"/>
+            <a:ext cx="9814255" cy="822960"/>
+          </a:xfrm>
+          <a:prstGeom prst="rect">
+            <a:avLst/>
+          </a:prstGeom>
+          <a:noFill/>
+          <a:ln/>
+        </p:spPr>
+        <p:txBody>
+          <a:bodyPr wrap="square" lIns="0" tIns="0" rIns="0" bIns="0" rtlCol="0" anchor="b">
+            <a:normAutofit/>
+          </a:bodyPr>
+          <a:lstStyle/>
+          <a:p>
+            <a:pPr indent="0" marL="0">
+              <a:buNone/>
+            </a:pPr>
+            <a:r>
+              <a:rPr lang="en-US" sz="3400" dirty="0">
+                <a:solidFill>
+                  <a:srgbClr val="F2F0EA"/>
+                </a:solidFill>
+                <a:latin typeface="Arial" pitchFamily="34" charset="0"/>
+                <a:ea typeface="Arial" pitchFamily="34" charset="-122"/>
+                <a:cs typeface="Arial" pitchFamily="34" charset="-120"/>
+              </a:rPr>
+              <a:t>Para fixar</a:t>
+            </a:r>
+            <a:endParaRPr lang="en-US" sz="3400" dirty="0"/>
+          </a:p>
+        </p:txBody>
+      </p:sp>
+      <p:sp>
+        <p:nvSpPr>
+          <p:cNvPr id="9" name="Shape 6"/>
+          <p:cNvSpPr/>
+          <p:nvPr/>
+        </p:nvSpPr>
+        <p:spPr>
+          <a:xfrm>
+            <a:off x="822960" y="1746504"/>
+            <a:ext cx="640080" cy="64008"/>
+          </a:xfrm>
+          <a:prstGeom prst="rect">
+            <a:avLst/>
+          </a:prstGeom>
+          <a:solidFill>
+            <a:srgbClr val="E4555C"/>
+          </a:solidFill>
+          <a:ln w="12700">
+            <a:solidFill>
+              <a:srgbClr val="E4555C"/>
+            </a:solidFill>
+            <a:prstDash val="solid"/>
+          </a:ln>
+        </p:spPr>
+      </p:sp>
+      <p:sp>
+        <p:nvSpPr>
+          <p:cNvPr id="10" name="Shape 7"/>
+          <p:cNvSpPr/>
+          <p:nvPr/>
+        </p:nvSpPr>
+        <p:spPr>
+          <a:xfrm>
+            <a:off x="1005840" y="2286000"/>
+            <a:ext cx="0" cy="2447544"/>
+          </a:xfrm>
+          <a:prstGeom prst="line">
+            <a:avLst/>
+          </a:prstGeom>
+          <a:noFill/>
+          <a:ln w="12700">
+            <a:solidFill>
+              <a:srgbClr val="A9A79F"/>
+            </a:solidFill>
+            <a:prstDash val="solid"/>
+          </a:ln>
+        </p:spPr>
+      </p:sp>
+      <p:sp>
+        <p:nvSpPr>
+          <p:cNvPr id="11" name="Shape 8"/>
+          <p:cNvSpPr/>
+          <p:nvPr/>
+        </p:nvSpPr>
+        <p:spPr>
+          <a:xfrm>
+            <a:off x="822960" y="2103120"/>
+            <a:ext cx="365760" cy="365760"/>
+          </a:xfrm>
+          <a:prstGeom prst="ellipse">
+            <a:avLst/>
+          </a:prstGeom>
+          <a:solidFill>
+            <a:srgbClr val="111111"/>
+          </a:solidFill>
+          <a:ln w="15875">
+            <a:solidFill>
+              <a:srgbClr val="F2F0EA"/>
+            </a:solidFill>
+            <a:prstDash val="solid"/>
+          </a:ln>
+        </p:spPr>
+      </p:sp>
+      <p:sp>
+        <p:nvSpPr>
+          <p:cNvPr id="12" name="Text 9"/>
+          <p:cNvSpPr/>
+          <p:nvPr/>
+        </p:nvSpPr>
+        <p:spPr>
+          <a:xfrm>
+            <a:off x="822960" y="2103120"/>
+            <a:ext cx="365760" cy="365760"/>
+          </a:xfrm>
+          <a:prstGeom prst="rect">
+            <a:avLst/>
+          </a:prstGeom>
+          <a:noFill/>
+          <a:ln/>
+        </p:spPr>
+        <p:txBody>
+          <a:bodyPr wrap="square" lIns="0" tIns="0" rIns="0" bIns="0" rtlCol="0" anchor="ctr"/>
+          <a:lstStyle/>
+          <a:p>
+            <a:pPr algn="ctr" indent="0" marL="0">
+              <a:buNone/>
+            </a:pPr>
+            <a:r>
+              <a:rPr lang="en-US" sz="1300" b="1" dirty="0">
+                <a:solidFill>
+                  <a:srgbClr val="F2F0EA"/>
+                </a:solidFill>
+                <a:latin typeface="Arial" pitchFamily="34" charset="0"/>
+                <a:ea typeface="Arial" pitchFamily="34" charset="-122"/>
+                <a:cs typeface="Arial" pitchFamily="34" charset="-120"/>
+              </a:rPr>
+              <a:t>1</a:t>
+            </a:r>
+            <a:endParaRPr lang="en-US" sz="1300" dirty="0"/>
+          </a:p>
+        </p:txBody>
+      </p:sp>
+      <p:sp>
+        <p:nvSpPr>
+          <p:cNvPr id="13" name="Text 10"/>
+          <p:cNvSpPr/>
+          <p:nvPr/>
+        </p:nvSpPr>
+        <p:spPr>
+          <a:xfrm>
+            <a:off x="1417320" y="2112264"/>
+            <a:ext cx="9174175" cy="1223772"/>
+          </a:xfrm>
+          <a:prstGeom prst="rect">
+            <a:avLst/>
+          </a:prstGeom>
+          <a:noFill/>
+          <a:ln/>
+        </p:spPr>
+        <p:txBody>
+          <a:bodyPr wrap="square" lIns="0" tIns="0" rIns="0" bIns="0" rtlCol="0" anchor="t">
+            <a:normAutofit/>
+          </a:bodyPr>
+          <a:lstStyle/>
+          <a:p>
+            <a:pPr indent="0" marL="0">
+              <a:lnSpc>
+                <a:spcPct val="105000"/>
+              </a:lnSpc>
+              <a:buNone/>
+            </a:pPr>
+            <a:r>
+              <a:rPr lang="en-US" sz="2200" dirty="0">
+                <a:solidFill>
+                  <a:srgbClr val="F2F0EA"/>
+                </a:solidFill>
+                <a:latin typeface="Arial" pitchFamily="34" charset="0"/>
+                <a:ea typeface="Arial" pitchFamily="34" charset="-122"/>
+                <a:cs typeface="Arial" pitchFamily="34" charset="-120"/>
+              </a:rPr>
+              <a:t>Trabalhaste o trio da passarola: o engenho do padre Bartolomeu Lourenço, os olhos de Blimunda, que recolhem vontades em jejum, e a mão direita de Baltasar, que construiu.</a:t>
+            </a:r>
+            <a:endParaRPr lang="en-US" sz="2200" dirty="0"/>
+          </a:p>
+        </p:txBody>
+      </p:sp>
+      <p:sp>
+        <p:nvSpPr>
+          <p:cNvPr id="14" name="Shape 11"/>
+          <p:cNvSpPr/>
+          <p:nvPr/>
+        </p:nvSpPr>
+        <p:spPr>
+          <a:xfrm>
+            <a:off x="822960" y="3326892"/>
+            <a:ext cx="365760" cy="365760"/>
+          </a:xfrm>
+          <a:prstGeom prst="ellipse">
+            <a:avLst/>
+          </a:prstGeom>
+          <a:solidFill>
+            <a:srgbClr val="111111"/>
+          </a:solidFill>
+          <a:ln w="15875">
+            <a:solidFill>
+              <a:srgbClr val="F2F0EA"/>
+            </a:solidFill>
+            <a:prstDash val="solid"/>
+          </a:ln>
+        </p:spPr>
+      </p:sp>
+      <p:sp>
+        <p:nvSpPr>
+          <p:cNvPr id="15" name="Text 12"/>
+          <p:cNvSpPr/>
+          <p:nvPr/>
+        </p:nvSpPr>
+        <p:spPr>
+          <a:xfrm>
+            <a:off x="822960" y="3326892"/>
+            <a:ext cx="365760" cy="365760"/>
+          </a:xfrm>
+          <a:prstGeom prst="rect">
+            <a:avLst/>
+          </a:prstGeom>
+          <a:noFill/>
+          <a:ln/>
+        </p:spPr>
+        <p:txBody>
+          <a:bodyPr wrap="square" lIns="0" tIns="0" rIns="0" bIns="0" rtlCol="0" anchor="ctr"/>
+          <a:lstStyle/>
+          <a:p>
+            <a:pPr algn="ctr" indent="0" marL="0">
+              <a:buNone/>
+            </a:pPr>
+            <a:r>
+              <a:rPr lang="en-US" sz="1300" b="1" dirty="0">
+                <a:solidFill>
+                  <a:srgbClr val="F2F0EA"/>
+                </a:solidFill>
+                <a:latin typeface="Arial" pitchFamily="34" charset="0"/>
+                <a:ea typeface="Arial" pitchFamily="34" charset="-122"/>
+                <a:cs typeface="Arial" pitchFamily="34" charset="-120"/>
+              </a:rPr>
+              <a:t>2</a:t>
+            </a:r>
+            <a:endParaRPr lang="en-US" sz="1300" dirty="0"/>
+          </a:p>
+        </p:txBody>
+      </p:sp>
+      <p:sp>
+        <p:nvSpPr>
+          <p:cNvPr id="16" name="Text 13"/>
+          <p:cNvSpPr/>
+          <p:nvPr/>
+        </p:nvSpPr>
+        <p:spPr>
+          <a:xfrm>
+            <a:off x="1417320" y="3336036"/>
+            <a:ext cx="9174175" cy="1223772"/>
+          </a:xfrm>
+          <a:prstGeom prst="rect">
+            <a:avLst/>
+          </a:prstGeom>
+          <a:noFill/>
+          <a:ln/>
+        </p:spPr>
+        <p:txBody>
+          <a:bodyPr wrap="square" lIns="0" tIns="0" rIns="0" bIns="0" rtlCol="0" anchor="t">
+            <a:normAutofit/>
+          </a:bodyPr>
+          <a:lstStyle/>
+          <a:p>
+            <a:pPr indent="0" marL="0">
+              <a:lnSpc>
+                <a:spcPct val="105000"/>
+              </a:lnSpc>
+              <a:buNone/>
+            </a:pPr>
+            <a:r>
+              <a:rPr lang="en-US" sz="2200" dirty="0">
+                <a:solidFill>
+                  <a:srgbClr val="F2F0EA"/>
+                </a:solidFill>
+                <a:latin typeface="Arial" pitchFamily="34" charset="0"/>
+                <a:ea typeface="Arial" pitchFamily="34" charset="-122"/>
+                <a:cs typeface="Arial" pitchFamily="34" charset="-120"/>
+              </a:rPr>
+              <a:t>A passarola é um símbolo: representa o sonho, a liberdade e a ciência, enquanto o convento representa o poder, a vaidade régia e o sacrifício de milhares.</a:t>
+            </a:r>
+            <a:endParaRPr lang="en-US" sz="2200" dirty="0"/>
+          </a:p>
+        </p:txBody>
+      </p:sp>
+      <p:sp>
+        <p:nvSpPr>
+          <p:cNvPr id="17" name="Shape 14"/>
+          <p:cNvSpPr/>
+          <p:nvPr/>
+        </p:nvSpPr>
+        <p:spPr>
+          <a:xfrm>
+            <a:off x="822960" y="4550664"/>
+            <a:ext cx="365760" cy="365760"/>
+          </a:xfrm>
+          <a:prstGeom prst="ellipse">
+            <a:avLst/>
+          </a:prstGeom>
+          <a:solidFill>
+            <a:srgbClr val="111111"/>
+          </a:solidFill>
+          <a:ln w="15875">
+            <a:solidFill>
+              <a:srgbClr val="F2F0EA"/>
+            </a:solidFill>
+            <a:prstDash val="solid"/>
+          </a:ln>
+        </p:spPr>
+      </p:sp>
+      <p:sp>
+        <p:nvSpPr>
+          <p:cNvPr id="18" name="Text 15"/>
+          <p:cNvSpPr/>
+          <p:nvPr/>
+        </p:nvSpPr>
+        <p:spPr>
+          <a:xfrm>
+            <a:off x="822960" y="4550664"/>
+            <a:ext cx="365760" cy="365760"/>
+          </a:xfrm>
+          <a:prstGeom prst="rect">
+            <a:avLst/>
+          </a:prstGeom>
+          <a:noFill/>
+          <a:ln/>
+        </p:spPr>
+        <p:txBody>
+          <a:bodyPr wrap="square" lIns="0" tIns="0" rIns="0" bIns="0" rtlCol="0" anchor="ctr"/>
+          <a:lstStyle/>
+          <a:p>
+            <a:pPr algn="ctr" indent="0" marL="0">
+              <a:buNone/>
+            </a:pPr>
+            <a:r>
+              <a:rPr lang="en-US" sz="1300" b="1" dirty="0">
+                <a:solidFill>
+                  <a:srgbClr val="F2F0EA"/>
+                </a:solidFill>
+                <a:latin typeface="Arial" pitchFamily="34" charset="0"/>
+                <a:ea typeface="Arial" pitchFamily="34" charset="-122"/>
+                <a:cs typeface="Arial" pitchFamily="34" charset="-120"/>
+              </a:rPr>
+              <a:t>3</a:t>
+            </a:r>
+            <a:endParaRPr lang="en-US" sz="1300" dirty="0"/>
+          </a:p>
+        </p:txBody>
+      </p:sp>
+      <p:sp>
+        <p:nvSpPr>
+          <p:cNvPr id="19" name="Text 16"/>
+          <p:cNvSpPr/>
+          <p:nvPr/>
+        </p:nvSpPr>
+        <p:spPr>
+          <a:xfrm>
+            <a:off x="1417320" y="4559808"/>
+            <a:ext cx="9174175" cy="1223772"/>
+          </a:xfrm>
+          <a:prstGeom prst="rect">
+            <a:avLst/>
+          </a:prstGeom>
+          <a:noFill/>
+          <a:ln/>
+        </p:spPr>
+        <p:txBody>
+          <a:bodyPr wrap="square" lIns="0" tIns="0" rIns="0" bIns="0" rtlCol="0" anchor="t">
+            <a:normAutofit/>
+          </a:bodyPr>
+          <a:lstStyle/>
+          <a:p>
+            <a:pPr indent="0" marL="0">
+              <a:lnSpc>
+                <a:spcPct val="105000"/>
+              </a:lnSpc>
+              <a:buNone/>
+            </a:pPr>
+            <a:r>
+              <a:rPr lang="en-US" sz="2200" dirty="0">
+                <a:solidFill>
+                  <a:srgbClr val="F2F0EA"/>
+                </a:solidFill>
+                <a:latin typeface="Arial" pitchFamily="34" charset="0"/>
+                <a:ea typeface="Arial" pitchFamily="34" charset="-122"/>
+                <a:cs typeface="Arial" pitchFamily="34" charset="-120"/>
+              </a:rPr>
+              <a:t>No capítulo XXV, Blimunda chega a Lisboa em jejum, vê a vontade de Baltasar num auto de fé e chama-a: a vontade fica na terra, com ela.</a:t>
+            </a:r>
+            <a:endParaRPr lang="en-US" sz="2200" dirty="0"/>
+          </a:p>
+        </p:txBody>
+      </p:sp>
+    </p:spTree>
+  </p:cSld>
+  <p:clrMapOvr>
+    <a:masterClrMapping/>
+  </p:clrMapOvr>
+</p:sld>
+</file>
+
+<file path=ppt/slides/slide12.xml><?xml version="1.0" encoding="utf-8"?>
+<p:sld xmlns:a="http://schemas.openxmlformats.org/drawingml/2006/main" xmlns:r="http://schemas.openxmlformats.org/officeDocument/2006/relationships" xmlns:p="http://schemas.openxmlformats.org/presentationml/2006/main">
+  <p:cSld name="Slide 12">
+    <p:bg>
+      <p:bgPr>
+        <a:solidFill>
+          <a:srgbClr val="111111"/>
+        </a:solidFill>
+      </p:bgPr>
+    </p:bg>
+    <p:spTree>
+      <p:nvGrpSpPr>
+        <p:cNvPr id="1" name=""/>
+        <p:cNvGrpSpPr/>
+        <p:nvPr/>
+      </p:nvGrpSpPr>
+      <p:grpSpPr>
+        <a:xfrm>
+          <a:off x="0" y="0"/>
+          <a:ext cx="0" cy="0"/>
+          <a:chOff x="0" y="0"/>
+          <a:chExt cx="0" cy="0"/>
+        </a:xfrm>
+      </p:grpSpPr>
+      <p:sp>
+        <p:nvSpPr>
+          <p:cNvPr id="3" name="Text 0"/>
+          <p:cNvSpPr/>
+          <p:nvPr/>
+        </p:nvSpPr>
+        <p:spPr>
+          <a:xfrm>
+            <a:off x="10637215" y="384048"/>
+            <a:ext cx="731520" cy="365760"/>
+          </a:xfrm>
+          <a:prstGeom prst="rect">
+            <a:avLst/>
+          </a:prstGeom>
+          <a:noFill/>
+          <a:ln/>
+        </p:spPr>
+        <p:txBody>
+          <a:bodyPr wrap="square" lIns="0" tIns="0" rIns="0" bIns="0" rtlCol="0" anchor="ctr"/>
+          <a:lstStyle/>
+          <a:p>
+            <a:pPr algn="r" indent="0" marL="0">
+              <a:buNone/>
+            </a:pPr>
+            <a:r>
+              <a:rPr lang="en-US" sz="1200" b="1" spc="300" kern="0" dirty="0">
+                <a:solidFill>
+                  <a:srgbClr val="A9A79F"/>
+                </a:solidFill>
+                <a:latin typeface="Arial" pitchFamily="34" charset="0"/>
+                <a:ea typeface="Arial" pitchFamily="34" charset="-122"/>
+                <a:cs typeface="Arial" pitchFamily="34" charset="-120"/>
+              </a:rPr>
+              <a:t>EPI</a:t>
+            </a:r>
+            <a:endParaRPr lang="en-US" sz="1200" dirty="0"/>
+          </a:p>
+        </p:txBody>
+      </p:sp>
+      <p:sp>
+        <p:nvSpPr>
+          <p:cNvPr id="4" name="Text 1"/>
+          <p:cNvSpPr/>
+          <p:nvPr/>
+        </p:nvSpPr>
+        <p:spPr>
+          <a:xfrm>
+            <a:off x="822960" y="6400800"/>
+            <a:ext cx="9631375" cy="274320"/>
+          </a:xfrm>
+          <a:prstGeom prst="rect">
+            <a:avLst/>
+          </a:prstGeom>
+          <a:noFill/>
+          <a:ln/>
+        </p:spPr>
+        <p:txBody>
+          <a:bodyPr wrap="square" lIns="0" tIns="0" rIns="0" bIns="0" rtlCol="0" anchor="ctr"/>
+          <a:lstStyle/>
+          <a:p>
+            <a:pPr indent="0" marL="0">
+              <a:buNone/>
+            </a:pPr>
+            <a:r>
+              <a:rPr lang="en-US" sz="1000" dirty="0">
+                <a:solidFill>
+                  <a:srgbClr val="A9A79F"/>
+                </a:solidFill>
+                <a:latin typeface="Arial" pitchFamily="34" charset="0"/>
+                <a:ea typeface="Arial" pitchFamily="34" charset="-122"/>
+                <a:cs typeface="Arial" pitchFamily="34" charset="-120"/>
+              </a:rPr>
+              <a:t>Lição M9-F02, Ver e não ver</a:t>
+            </a:r>
+            <a:endParaRPr lang="en-US" sz="1000" dirty="0"/>
+          </a:p>
+        </p:txBody>
+      </p:sp>
+      <p:sp>
+        <p:nvSpPr>
+          <p:cNvPr id="5" name="Text 2"/>
+          <p:cNvSpPr/>
+          <p:nvPr/>
+        </p:nvSpPr>
+        <p:spPr>
+          <a:xfrm>
+            <a:off x="10637215" y="6400800"/>
+            <a:ext cx="731520" cy="274320"/>
+          </a:xfrm>
+          <a:prstGeom prst="rect">
+            <a:avLst/>
+          </a:prstGeom>
+          <a:noFill/>
+          <a:ln/>
+        </p:spPr>
+        <p:txBody>
+          <a:bodyPr wrap="square" lIns="0" tIns="0" rIns="0" bIns="0" rtlCol="0" anchor="ctr"/>
+          <a:lstStyle/>
+          <a:p>
+            <a:pPr algn="r" indent="0" marL="0">
+              <a:buNone/>
+            </a:pPr>
+            <a:r>
+              <a:rPr lang="en-US" sz="1000" dirty="0">
+                <a:solidFill>
+                  <a:srgbClr val="A9A79F"/>
+                </a:solidFill>
+                <a:latin typeface="Arial" pitchFamily="34" charset="0"/>
+                <a:ea typeface="Arial" pitchFamily="34" charset="-122"/>
+                <a:cs typeface="Arial" pitchFamily="34" charset="-120"/>
+              </a:rPr>
+              <a:t>12</a:t>
             </a:r>
             <a:endParaRPr lang="en-US" sz="1000" dirty="0"/>
           </a:p>
